--- a/slides/membership-meeting-template/output/membership-meeting-june-18-2026.pptx
+++ b/slides/membership-meeting-template/output/membership-meeting-june-18-2026.pptx
@@ -15,9 +15,10 @@
     <p:sldId id="263" r:id="rId9"/>
     <p:sldId id="264" r:id="rId10"/>
     <p:sldId id="265" r:id="rId11"/>
+    <p:sldId id="266" r:id="rId12"/>
   </p:sldIdLst>
   <p:notesMasterIdLst>
-    <p:notesMasterId r:id="rId12"/>
+    <p:notesMasterId r:id="rId13"/>
   </p:notesMasterIdLst>
   <p:sldSz cx="12192000" cy="6858000"/>
   <p:notesSz cx="6858000" cy="12192000"/>
@@ -623,6 +624,94 @@
             <a:fld id="{F7021451-1387-4CA6-816F-3879F97B5CBC}" type="slidenum">
               <a:rPr lang="en-US"/>
               <a:t>10</a:t>
+            </a:fld>
+            <a:endParaRPr lang="en-US"/>
+          </a:p>
+        </p:txBody>
+      </p:sp>
+    </p:spTree>
+    <p:extLst>
+      <p:ext uri="{BB962C8B-B14F-4D97-AF65-F5344CB8AC3E}">
+        <p14:creationId xmlns:p14="http://schemas.microsoft.com/office/powerpoint/2010/main" val="1024086991"/>
+      </p:ext>
+    </p:extLst>
+  </p:cSld>
+  <p:clrMapOvr>
+    <a:masterClrMapping/>
+  </p:clrMapOvr>
+</p:notes>
+</file>
+
+<file path=ppt/notesSlides/notesSlide11.xml><?xml version="1.0" encoding="utf-8"?>
+<p:notes xmlns:a="http://schemas.openxmlformats.org/drawingml/2006/main" xmlns:r="http://schemas.openxmlformats.org/officeDocument/2006/relationships" xmlns:p="http://schemas.openxmlformats.org/presentationml/2006/main">
+  <p:cSld>
+    <p:spTree>
+      <p:nvGrpSpPr>
+        <p:cNvPr id="1" name=""/>
+        <p:cNvGrpSpPr/>
+        <p:nvPr/>
+      </p:nvGrpSpPr>
+      <p:grpSpPr>
+        <a:xfrm>
+          <a:off x="0" y="0"/>
+          <a:ext cx="0" cy="0"/>
+          <a:chOff x="0" y="0"/>
+          <a:chExt cx="0" cy="0"/>
+        </a:xfrm>
+      </p:grpSpPr>
+      <p:sp>
+        <p:nvSpPr>
+          <p:cNvPr id="2" name="Slide Image Placeholder 1"/>
+          <p:cNvSpPr>
+            <a:spLocks noGrp="1" noRot="1" noChangeAspect="1"/>
+          </p:cNvSpPr>
+          <p:nvPr>
+            <p:ph type="sldImg"/>
+          </p:nvPr>
+        </p:nvSpPr>
+        <p:spPr/>
+      </p:sp>
+      <p:sp>
+        <p:nvSpPr>
+          <p:cNvPr id="3" name="Notes Placeholder 2"/>
+          <p:cNvSpPr>
+            <a:spLocks noGrp="1"/>
+          </p:cNvSpPr>
+          <p:nvPr>
+            <p:ph type="body" idx="1"/>
+          </p:nvPr>
+        </p:nvSpPr>
+        <p:spPr/>
+        <p:txBody>
+          <a:bodyPr/>
+          <a:lstStyle/>
+          <a:p>
+            <a:r>
+              <a:rPr lang="en-US" dirty="0"/>
+              <a:t/>
+            </a:r>
+            <a:endParaRPr lang="en-US" dirty="0"/>
+          </a:p>
+        </p:txBody>
+      </p:sp>
+      <p:sp>
+        <p:nvSpPr>
+          <p:cNvPr id="4" name="Slide Number Placeholder 3"/>
+          <p:cNvSpPr>
+            <a:spLocks noGrp="1"/>
+          </p:cNvSpPr>
+          <p:nvPr>
+            <p:ph type="sldNum" sz="quarter" idx="10"/>
+          </p:nvPr>
+        </p:nvSpPr>
+        <p:spPr/>
+        <p:txBody>
+          <a:bodyPr/>
+          <a:lstStyle/>
+          <a:p>
+            <a:fld id="{F7021451-1387-4CA6-816F-3879F97B5CBC}" type="slidenum">
+              <a:rPr lang="en-US"/>
+              <a:t>11</a:t>
             </a:fld>
             <a:endParaRPr lang="en-US"/>
           </a:p>
@@ -1941,7 +2030,7 @@
         <p:spPr>
           <a:xfrm>
             <a:off x="749808" y="4352544"/>
-            <a:ext cx="1499616" cy="475488"/>
+            <a:ext cx="1444752" cy="475488"/>
           </a:xfrm>
           <a:prstGeom prst="roundRect">
             <a:avLst>
@@ -1968,7 +2057,7 @@
         <p:spPr>
           <a:xfrm>
             <a:off x="859536" y="4471416"/>
-            <a:ext cx="1280160" cy="146304"/>
+            <a:ext cx="1225296" cy="146304"/>
           </a:xfrm>
           <a:prstGeom prst="rect">
             <a:avLst/>
@@ -1986,7 +2075,7 @@
               <a:buNone/>
             </a:pPr>
             <a:r>
-              <a:rPr lang="en-US" sz="1100" b="1" dirty="0">
+              <a:rPr lang="en-US" sz="1060" b="1" dirty="0">
                 <a:solidFill>
                   <a:srgbClr val="4C1D95"/>
                 </a:solidFill>
@@ -1996,7 +2085,7 @@
               </a:rPr>
               <a:t>Thursday, June 18</a:t>
             </a:r>
-            <a:endParaRPr lang="en-US" sz="1100" dirty="0"/>
+            <a:endParaRPr lang="en-US" sz="1060" dirty="0"/>
           </a:p>
         </p:txBody>
       </p:sp>
@@ -2008,8 +2097,8 @@
         </p:nvSpPr>
         <p:spPr>
           <a:xfrm>
-            <a:off x="2377440" y="4352544"/>
-            <a:ext cx="1499616" cy="475488"/>
+            <a:off x="2331720" y="4352544"/>
+            <a:ext cx="1353312" cy="475488"/>
           </a:xfrm>
           <a:prstGeom prst="roundRect">
             <a:avLst>
@@ -2035,8 +2124,8 @@
         </p:nvSpPr>
         <p:spPr>
           <a:xfrm>
-            <a:off x="2487168" y="4471416"/>
-            <a:ext cx="1280160" cy="146304"/>
+            <a:off x="2441448" y="4471416"/>
+            <a:ext cx="1133856" cy="146304"/>
           </a:xfrm>
           <a:prstGeom prst="rect">
             <a:avLst/>
@@ -2054,7 +2143,7 @@
               <a:buNone/>
             </a:pPr>
             <a:r>
-              <a:rPr lang="en-US" sz="1100" b="1" dirty="0">
+              <a:rPr lang="en-US" sz="1060" b="1" dirty="0">
                 <a:solidFill>
                   <a:srgbClr val="4C1D95"/>
                 </a:solidFill>
@@ -2064,7 +2153,7 @@
               </a:rPr>
               <a:t>Noon to 1 p.m.</a:t>
             </a:r>
-            <a:endParaRPr lang="en-US" sz="1100" dirty="0"/>
+            <a:endParaRPr lang="en-US" sz="1060" dirty="0"/>
           </a:p>
         </p:txBody>
       </p:sp>
@@ -2076,8 +2165,8 @@
         </p:nvSpPr>
         <p:spPr>
           <a:xfrm>
-            <a:off x="4005072" y="4352544"/>
-            <a:ext cx="1499616" cy="475488"/>
+            <a:off x="3822192" y="4352544"/>
+            <a:ext cx="1664208" cy="475488"/>
           </a:xfrm>
           <a:prstGeom prst="roundRect">
             <a:avLst>
@@ -2103,8 +2192,8 @@
         </p:nvSpPr>
         <p:spPr>
           <a:xfrm>
-            <a:off x="4114800" y="4471416"/>
-            <a:ext cx="1280160" cy="146304"/>
+            <a:off x="3931920" y="4471416"/>
+            <a:ext cx="1444752" cy="146304"/>
           </a:xfrm>
           <a:prstGeom prst="rect">
             <a:avLst/>
@@ -2122,7 +2211,7 @@
               <a:buNone/>
             </a:pPr>
             <a:r>
-              <a:rPr lang="en-US" sz="1100" b="1" dirty="0">
+              <a:rPr lang="en-US" sz="1060" b="1" dirty="0">
                 <a:solidFill>
                   <a:srgbClr val="4C1D95"/>
                 </a:solidFill>
@@ -2130,9 +2219,9 @@
                 <a:ea typeface="Inter" pitchFamily="34" charset="-122"/>
                 <a:cs typeface="Inter" pitchFamily="34" charset="-120"/>
               </a:rPr>
-              <a:t>Online via Zoom</a:t>
-            </a:r>
-            <a:endParaRPr lang="en-US" sz="1100" dirty="0"/>
+              <a:t>MU 211 or Zoom</a:t>
+            </a:r>
+            <a:endParaRPr lang="en-US" sz="1060" dirty="0"/>
           </a:p>
         </p:txBody>
       </p:sp>
@@ -2188,6 +2277,395 @@
 <file path=ppt/slides/slide10.xml><?xml version="1.0" encoding="utf-8"?>
 <p:sld xmlns:a="http://schemas.openxmlformats.org/drawingml/2006/main" xmlns:r="http://schemas.openxmlformats.org/officeDocument/2006/relationships" xmlns:p="http://schemas.openxmlformats.org/presentationml/2006/main">
   <p:cSld name="Slide 10">
+    <p:bg>
+      <p:bgPr>
+        <a:solidFill>
+          <a:srgbClr val="4C1D95"/>
+        </a:solidFill>
+      </p:bgPr>
+    </p:bg>
+    <p:spTree>
+      <p:nvGrpSpPr>
+        <p:cNvPr id="1" name=""/>
+        <p:cNvGrpSpPr/>
+        <p:nvPr/>
+      </p:nvGrpSpPr>
+      <p:grpSpPr>
+        <a:xfrm>
+          <a:off x="0" y="0"/>
+          <a:ext cx="0" cy="0"/>
+          <a:chOff x="0" y="0"/>
+          <a:chExt cx="0" cy="0"/>
+        </a:xfrm>
+      </p:grpSpPr>
+      <p:pic>
+        <p:nvPicPr>
+          <p:cNvPr id="2" name="Image 0" descr="/Users/jaxsnjohnson/github/seiu-website/resources/zoom-backgrounds/2026-bargaining/SEIU-503-Bargaining-2026-Fists-Landscape.png">    </p:cNvPr>
+          <p:cNvPicPr>
+            <a:picLocks noChangeAspect="1"/>
+          </p:cNvPicPr>
+          <p:nvPr/>
+        </p:nvPicPr>
+        <p:blipFill>
+          <a:blip r:embed="rId1"/>
+          <a:srcRect l="1" r="1" t="0" b="0"/>
+          <a:stretch/>
+        </p:blipFill>
+        <p:spPr>
+          <a:xfrm>
+            <a:off x="0" y="0"/>
+            <a:ext cx="12191695" cy="6858000"/>
+          </a:xfrm>
+          <a:prstGeom prst="rect">
+            <a:avLst/>
+          </a:prstGeom>
+        </p:spPr>
+      </p:pic>
+      <p:sp>
+        <p:nvSpPr>
+          <p:cNvPr id="3" name="Shape 0"/>
+          <p:cNvSpPr/>
+          <p:nvPr/>
+        </p:nvSpPr>
+        <p:spPr>
+          <a:xfrm>
+            <a:off x="0" y="0"/>
+            <a:ext cx="12191695" cy="6858000"/>
+          </a:xfrm>
+          <a:prstGeom prst="rect">
+            <a:avLst/>
+          </a:prstGeom>
+          <a:solidFill>
+            <a:srgbClr val="4C1D95">
+              <a:alpha val="56000"/>
+            </a:srgbClr>
+          </a:solidFill>
+          <a:ln w="12700">
+            <a:solidFill>
+              <a:srgbClr val="4C1D95">
+                <a:alpha val="0"/>
+              </a:srgbClr>
+            </a:solidFill>
+            <a:prstDash val="solid"/>
+          </a:ln>
+        </p:spPr>
+      </p:sp>
+      <p:sp>
+        <p:nvSpPr>
+          <p:cNvPr id="4" name="Text 1"/>
+          <p:cNvSpPr/>
+          <p:nvPr/>
+        </p:nvSpPr>
+        <p:spPr>
+          <a:xfrm>
+            <a:off x="749808" y="841248"/>
+            <a:ext cx="7315200" cy="868680"/>
+          </a:xfrm>
+          <a:prstGeom prst="rect">
+            <a:avLst/>
+          </a:prstGeom>
+          <a:noFill/>
+          <a:ln/>
+        </p:spPr>
+        <p:txBody>
+          <a:bodyPr wrap="square" lIns="0" tIns="0" rIns="0" bIns="0" rtlCol="0" anchor="ctr">
+            <a:normAutofit/>
+          </a:bodyPr>
+          <a:lstStyle/>
+          <a:p>
+            <a:pPr indent="0" marL="0">
+              <a:buNone/>
+            </a:pPr>
+            <a:r>
+              <a:rPr lang="en-US" sz="4200" b="1" dirty="0">
+                <a:solidFill>
+                  <a:srgbClr val="FFFFFF"/>
+                </a:solidFill>
+                <a:latin typeface="Lora" pitchFamily="34" charset="0"/>
+                <a:ea typeface="Lora" pitchFamily="34" charset="-122"/>
+                <a:cs typeface="Lora" pitchFamily="34" charset="-120"/>
+              </a:rPr>
+              <a:t>June 30: show up for our contract</a:t>
+            </a:r>
+            <a:endParaRPr lang="en-US" sz="4200" dirty="0"/>
+          </a:p>
+        </p:txBody>
+      </p:sp>
+      <p:sp>
+        <p:nvSpPr>
+          <p:cNvPr id="5" name="Text 2"/>
+          <p:cNvSpPr/>
+          <p:nvPr/>
+        </p:nvSpPr>
+        <p:spPr>
+          <a:xfrm>
+            <a:off x="786384" y="1956816"/>
+            <a:ext cx="6400800" cy="256032"/>
+          </a:xfrm>
+          <a:prstGeom prst="rect">
+            <a:avLst/>
+          </a:prstGeom>
+          <a:noFill/>
+          <a:ln/>
+        </p:spPr>
+        <p:txBody>
+          <a:bodyPr wrap="square" lIns="0" tIns="0" rIns="0" bIns="0" rtlCol="0" anchor="ctr"/>
+          <a:lstStyle/>
+          <a:p>
+            <a:pPr indent="0" marL="0">
+              <a:buNone/>
+            </a:pPr>
+            <a:r>
+              <a:rPr lang="en-US" sz="2100" b="1" dirty="0">
+                <a:solidFill>
+                  <a:srgbClr val="E9D5FF"/>
+                </a:solidFill>
+                <a:latin typeface="Inter" pitchFamily="34" charset="0"/>
+                <a:ea typeface="Inter" pitchFamily="34" charset="-122"/>
+                <a:cs typeface="Inter" pitchFamily="34" charset="-120"/>
+              </a:rPr>
+              <a:t>Tuesday, June 30 | Noon-1 p.m. | McNary Field</a:t>
+            </a:r>
+            <a:endParaRPr lang="en-US" sz="2100" dirty="0"/>
+          </a:p>
+        </p:txBody>
+      </p:sp>
+      <p:sp>
+        <p:nvSpPr>
+          <p:cNvPr id="6" name="Shape 3"/>
+          <p:cNvSpPr/>
+          <p:nvPr/>
+        </p:nvSpPr>
+        <p:spPr>
+          <a:xfrm>
+            <a:off x="822960" y="2816352"/>
+            <a:ext cx="5212080" cy="1938528"/>
+          </a:xfrm>
+          <a:prstGeom prst="roundRect">
+            <a:avLst>
+              <a:gd name="adj" fmla="val 3774"/>
+            </a:avLst>
+          </a:prstGeom>
+          <a:solidFill>
+            <a:srgbClr val="FFFFFF"/>
+          </a:solidFill>
+          <a:ln w="12700">
+            <a:solidFill>
+              <a:srgbClr val="FFFFFF"/>
+            </a:solidFill>
+            <a:prstDash val="solid"/>
+          </a:ln>
+        </p:spPr>
+      </p:sp>
+      <p:sp>
+        <p:nvSpPr>
+          <p:cNvPr id="7" name="Text 4"/>
+          <p:cNvSpPr/>
+          <p:nvPr/>
+        </p:nvSpPr>
+        <p:spPr>
+          <a:xfrm>
+            <a:off x="1133856" y="3127248"/>
+            <a:ext cx="4462272" cy="1170432"/>
+          </a:xfrm>
+          <a:prstGeom prst="rect">
+            <a:avLst/>
+          </a:prstGeom>
+          <a:noFill/>
+          <a:ln/>
+        </p:spPr>
+        <p:txBody>
+          <a:bodyPr wrap="square" lIns="0" tIns="0" rIns="0" bIns="0" rtlCol="0" anchor="t">
+            <a:normAutofit/>
+          </a:bodyPr>
+          <a:lstStyle/>
+          <a:p>
+            <a:pPr marL="190500" indent="-190500">
+              <a:spcAft>
+                <a:spcPts val="200"/>
+              </a:spcAft>
+              <a:buSzPct val="100000"/>
+              <a:buChar char="•"/>
+            </a:pPr>
+            <a:r>
+              <a:rPr lang="en-US" sz="1820" dirty="0">
+                <a:solidFill>
+                  <a:srgbClr val="1F2937"/>
+                </a:solidFill>
+                <a:latin typeface="Inter" pitchFamily="34" charset="0"/>
+                <a:ea typeface="Inter" pitchFamily="34" charset="-122"/>
+                <a:cs typeface="Inter" pitchFamily="34" charset="-120"/>
+              </a:rPr>
+              <a:t>Sign up now</a:t>
+            </a:r>
+            <a:endParaRPr lang="en-US" sz="1820" dirty="0"/>
+          </a:p>
+          <a:p>
+            <a:pPr marL="190500" indent="-190500">
+              <a:spcAft>
+                <a:spcPts val="200"/>
+              </a:spcAft>
+              <a:buSzPct val="100000"/>
+              <a:buChar char="•"/>
+            </a:pPr>
+            <a:r>
+              <a:rPr lang="en-US" sz="1820" dirty="0">
+                <a:solidFill>
+                  <a:srgbClr val="1F2937"/>
+                </a:solidFill>
+                <a:latin typeface="Inter" pitchFamily="34" charset="0"/>
+                <a:ea typeface="Inter" pitchFamily="34" charset="-122"/>
+                <a:cs typeface="Inter" pitchFamily="34" charset="-120"/>
+              </a:rPr>
+              <a:t>Wear purple</a:t>
+            </a:r>
+            <a:endParaRPr lang="en-US" sz="1820" dirty="0"/>
+          </a:p>
+          <a:p>
+            <a:pPr marL="190500" indent="-190500">
+              <a:spcAft>
+                <a:spcPts val="200"/>
+              </a:spcAft>
+              <a:buSzPct val="100000"/>
+              <a:buChar char="•"/>
+            </a:pPr>
+            <a:r>
+              <a:rPr lang="en-US" sz="1820" dirty="0">
+                <a:solidFill>
+                  <a:srgbClr val="1F2937"/>
+                </a:solidFill>
+                <a:latin typeface="Inter" pitchFamily="34" charset="0"/>
+                <a:ea typeface="Inter" pitchFamily="34" charset="-122"/>
+                <a:cs typeface="Inter" pitchFamily="34" charset="-120"/>
+              </a:rPr>
+              <a:t>Bring one coworker</a:t>
+            </a:r>
+            <a:endParaRPr lang="en-US" sz="1820" dirty="0"/>
+          </a:p>
+          <a:p>
+            <a:pPr marL="190500" indent="-190500">
+              <a:spcAft>
+                <a:spcPts val="200"/>
+              </a:spcAft>
+              <a:buSzPct val="100000"/>
+              <a:buChar char="•"/>
+            </a:pPr>
+            <a:r>
+              <a:rPr lang="en-US" sz="1820" dirty="0">
+                <a:solidFill>
+                  <a:srgbClr val="1F2937"/>
+                </a:solidFill>
+                <a:latin typeface="Inter" pitchFamily="34" charset="0"/>
+                <a:ea typeface="Inter" pitchFamily="34" charset="-122"/>
+                <a:cs typeface="Inter" pitchFamily="34" charset="-120"/>
+              </a:rPr>
+              <a:t>Help turn out your work area</a:t>
+            </a:r>
+            <a:endParaRPr lang="en-US" sz="1820" dirty="0"/>
+          </a:p>
+        </p:txBody>
+      </p:sp>
+      <p:sp>
+        <p:nvSpPr>
+          <p:cNvPr id="8" name="Shape 5"/>
+          <p:cNvSpPr/>
+          <p:nvPr/>
+        </p:nvSpPr>
+        <p:spPr>
+          <a:xfrm>
+            <a:off x="7388352" y="2450592"/>
+            <a:ext cx="3310128" cy="3429000"/>
+          </a:xfrm>
+          <a:prstGeom prst="roundRect">
+            <a:avLst>
+              <a:gd name="adj" fmla="val 2210"/>
+            </a:avLst>
+          </a:prstGeom>
+          <a:solidFill>
+            <a:srgbClr val="FFFFFF"/>
+          </a:solidFill>
+          <a:ln w="12700">
+            <a:solidFill>
+              <a:srgbClr val="FFFFFF"/>
+            </a:solidFill>
+            <a:prstDash val="solid"/>
+          </a:ln>
+        </p:spPr>
+      </p:sp>
+      <p:pic>
+        <p:nvPicPr>
+          <p:cNvPr id="9" name="Image 1" descr="/Users/jaxsnjohnson/github/seiu-website/images/rally-signup-qr.png">    </p:cNvPr>
+          <p:cNvPicPr>
+            <a:picLocks noChangeAspect="1"/>
+          </p:cNvPicPr>
+          <p:nvPr/>
+        </p:nvPicPr>
+        <p:blipFill>
+          <a:blip r:embed="rId2"/>
+          <a:stretch>
+            <a:fillRect/>
+          </a:stretch>
+        </p:blipFill>
+        <p:spPr>
+          <a:xfrm>
+            <a:off x="7790688" y="2743200"/>
+            <a:ext cx="2514600" cy="2514600"/>
+          </a:xfrm>
+          <a:prstGeom prst="rect">
+            <a:avLst/>
+          </a:prstGeom>
+        </p:spPr>
+      </p:pic>
+      <p:sp>
+        <p:nvSpPr>
+          <p:cNvPr id="10" name="Text 6"/>
+          <p:cNvSpPr/>
+          <p:nvPr/>
+        </p:nvSpPr>
+        <p:spPr>
+          <a:xfrm>
+            <a:off x="7662672" y="5376672"/>
+            <a:ext cx="2816352" cy="219456"/>
+          </a:xfrm>
+          <a:prstGeom prst="rect">
+            <a:avLst/>
+          </a:prstGeom>
+          <a:noFill/>
+          <a:ln/>
+        </p:spPr>
+        <p:txBody>
+          <a:bodyPr wrap="square" lIns="0" tIns="0" rIns="0" bIns="0" rtlCol="0" anchor="ctr"/>
+          <a:lstStyle/>
+          <a:p>
+            <a:pPr algn="ctr" indent="0" marL="0">
+              <a:buNone/>
+            </a:pPr>
+            <a:r>
+              <a:rPr lang="en-US" sz="1900" b="1" dirty="0">
+                <a:solidFill>
+                  <a:srgbClr val="4C1D95"/>
+                </a:solidFill>
+                <a:latin typeface="Inter" pitchFamily="34" charset="0"/>
+                <a:ea typeface="Inter" pitchFamily="34" charset="-122"/>
+                <a:cs typeface="Inter" pitchFamily="34" charset="-120"/>
+              </a:rPr>
+              <a:t>local083.org/rally</a:t>
+            </a:r>
+            <a:endParaRPr lang="en-US" sz="1900" dirty="0"/>
+          </a:p>
+        </p:txBody>
+      </p:sp>
+    </p:spTree>
+  </p:cSld>
+  <p:clrMapOvr>
+    <a:masterClrMapping/>
+  </p:clrMapOvr>
+</p:sld>
+</file>
+
+<file path=ppt/slides/slide11.xml><?xml version="1.0" encoding="utf-8"?>
+<p:sld xmlns:a="http://schemas.openxmlformats.org/drawingml/2006/main" xmlns:r="http://schemas.openxmlformats.org/officeDocument/2006/relationships" xmlns:p="http://schemas.openxmlformats.org/presentationml/2006/main">
+  <p:cSld name="Slide 11">
     <p:bg>
       <p:bgPr>
         <a:solidFill>
@@ -2320,7 +2798,7 @@
                 <a:ea typeface="Inter" pitchFamily="34" charset="-122"/>
                 <a:cs typeface="Inter" pitchFamily="34" charset="-120"/>
               </a:rPr>
-              <a:t>10</a:t>
+              <a:t>11</a:t>
             </a:r>
             <a:endParaRPr lang="en-US" sz="880" dirty="0"/>
           </a:p>
@@ -6168,7 +6646,7 @@
         <p:spPr>
           <a:xfrm>
             <a:off x="658368" y="1828800"/>
-            <a:ext cx="8869680" cy="537210"/>
+            <a:ext cx="8869680" cy="658368"/>
           </a:xfrm>
           <a:prstGeom prst="rect">
             <a:avLst/>
@@ -6186,7 +6664,7 @@
               <a:buNone/>
             </a:pPr>
             <a:r>
-              <a:rPr lang="en-US" sz="1800" dirty="0">
+              <a:rPr lang="en-US" sz="1720" dirty="0">
                 <a:solidFill>
                   <a:srgbClr val="374151"/>
                 </a:solidFill>
@@ -6194,9 +6672,9 @@
                 <a:ea typeface="Inter" pitchFamily="34" charset="-122"/>
                 <a:cs typeface="Inter" pitchFamily="34" charset="-120"/>
               </a:rPr>
-              <a:t>Members should not face rumors, notices, or displacement questions alone.</a:t>
-            </a:r>
-            <a:endParaRPr lang="en-US" sz="1800" dirty="0"/>
+              <a:t>The CBA gives members notice, choices, placement rights, and recall rights. The clock moves fast.</a:t>
+            </a:r>
+            <a:endParaRPr lang="en-US" sz="1720" dirty="0"/>
           </a:p>
         </p:txBody>
       </p:sp>
@@ -6208,12 +6686,160 @@
         </p:nvSpPr>
         <p:spPr>
           <a:xfrm>
-            <a:off x="822960" y="2450592"/>
-            <a:ext cx="4407408" cy="3017520"/>
+            <a:off x="822960" y="2633472"/>
+            <a:ext cx="4617720" cy="987552"/>
           </a:xfrm>
           <a:prstGeom prst="roundRect">
             <a:avLst>
-              <a:gd name="adj" fmla="val 2424"/>
+              <a:gd name="adj" fmla="val 7407"/>
+            </a:avLst>
+          </a:prstGeom>
+          <a:solidFill>
+            <a:srgbClr val="F5F3FF"/>
+          </a:solidFill>
+          <a:ln w="12700">
+            <a:solidFill>
+              <a:srgbClr val="EDE9FE"/>
+            </a:solidFill>
+            <a:prstDash val="solid"/>
+          </a:ln>
+        </p:spPr>
+      </p:sp>
+      <p:sp>
+        <p:nvSpPr>
+          <p:cNvPr id="9" name="Text 7"/>
+          <p:cNvSpPr/>
+          <p:nvPr/>
+        </p:nvSpPr>
+        <p:spPr>
+          <a:xfrm>
+            <a:off x="1051560" y="2779776"/>
+            <a:ext cx="1298448" cy="128016"/>
+          </a:xfrm>
+          <a:prstGeom prst="rect">
+            <a:avLst/>
+          </a:prstGeom>
+          <a:noFill/>
+          <a:ln/>
+        </p:spPr>
+        <p:txBody>
+          <a:bodyPr wrap="square" lIns="0" tIns="0" rIns="0" bIns="0" rtlCol="0" anchor="ctr"/>
+          <a:lstStyle/>
+          <a:p>
+            <a:pPr indent="0" marL="0">
+              <a:buNone/>
+            </a:pPr>
+            <a:r>
+              <a:rPr lang="en-US" sz="880" b="1" dirty="0">
+                <a:solidFill>
+                  <a:srgbClr val="6D28D9"/>
+                </a:solidFill>
+                <a:latin typeface="Inter" pitchFamily="34" charset="0"/>
+                <a:ea typeface="Inter" pitchFamily="34" charset="-122"/>
+                <a:cs typeface="Inter" pitchFamily="34" charset="-120"/>
+              </a:rPr>
+              <a:t>Art. 44 Sec. 1</a:t>
+            </a:r>
+            <a:endParaRPr lang="en-US" sz="880" dirty="0"/>
+          </a:p>
+        </p:txBody>
+      </p:sp>
+      <p:sp>
+        <p:nvSpPr>
+          <p:cNvPr id="10" name="Text 8"/>
+          <p:cNvSpPr/>
+          <p:nvPr/>
+        </p:nvSpPr>
+        <p:spPr>
+          <a:xfrm>
+            <a:off x="1051560" y="2990088"/>
+            <a:ext cx="1554480" cy="201168"/>
+          </a:xfrm>
+          <a:prstGeom prst="rect">
+            <a:avLst/>
+          </a:prstGeom>
+          <a:noFill/>
+          <a:ln/>
+        </p:spPr>
+        <p:txBody>
+          <a:bodyPr wrap="square" lIns="0" tIns="0" rIns="0" bIns="0" rtlCol="0" anchor="ctr">
+            <a:normAutofit/>
+          </a:bodyPr>
+          <a:lstStyle/>
+          <a:p>
+            <a:pPr indent="0" marL="0">
+              <a:buNone/>
+            </a:pPr>
+            <a:r>
+              <a:rPr lang="en-US" sz="2020" b="1" dirty="0">
+                <a:solidFill>
+                  <a:srgbClr val="4C1D95"/>
+                </a:solidFill>
+                <a:latin typeface="Lora" pitchFamily="34" charset="0"/>
+                <a:ea typeface="Lora" pitchFamily="34" charset="-122"/>
+                <a:cs typeface="Lora" pitchFamily="34" charset="-120"/>
+              </a:rPr>
+              <a:t>Written notice</a:t>
+            </a:r>
+            <a:endParaRPr lang="en-US" sz="2020" dirty="0"/>
+          </a:p>
+        </p:txBody>
+      </p:sp>
+      <p:sp>
+        <p:nvSpPr>
+          <p:cNvPr id="11" name="Text 9"/>
+          <p:cNvSpPr/>
+          <p:nvPr/>
+        </p:nvSpPr>
+        <p:spPr>
+          <a:xfrm>
+            <a:off x="2724912" y="2852928"/>
+            <a:ext cx="2331720" cy="420624"/>
+          </a:xfrm>
+          <a:prstGeom prst="rect">
+            <a:avLst/>
+          </a:prstGeom>
+          <a:noFill/>
+          <a:ln/>
+        </p:spPr>
+        <p:txBody>
+          <a:bodyPr wrap="square" lIns="0" tIns="0" rIns="0" bIns="0" rtlCol="0" anchor="ctr">
+            <a:normAutofit/>
+          </a:bodyPr>
+          <a:lstStyle/>
+          <a:p>
+            <a:pPr indent="0" marL="0">
+              <a:buNone/>
+            </a:pPr>
+            <a:r>
+              <a:rPr lang="en-US" sz="1250" dirty="0">
+                <a:solidFill>
+                  <a:srgbClr val="1F2937"/>
+                </a:solidFill>
+                <a:latin typeface="Inter" pitchFamily="34" charset="0"/>
+                <a:ea typeface="Inter" pitchFamily="34" charset="-122"/>
+                <a:cs typeface="Inter" pitchFamily="34" charset="-120"/>
+              </a:rPr>
+              <a:t>30 calendar days before layoff; 15 only if beyond Employer control.</a:t>
+            </a:r>
+            <a:endParaRPr lang="en-US" sz="1250" dirty="0"/>
+          </a:p>
+        </p:txBody>
+      </p:sp>
+      <p:sp>
+        <p:nvSpPr>
+          <p:cNvPr id="12" name="Shape 10"/>
+          <p:cNvSpPr/>
+          <p:nvPr/>
+        </p:nvSpPr>
+        <p:spPr>
+          <a:xfrm>
+            <a:off x="5870448" y="2633472"/>
+            <a:ext cx="4617720" cy="987552"/>
+          </a:xfrm>
+          <a:prstGeom prst="roundRect">
+            <a:avLst>
+              <a:gd name="adj" fmla="val 7407"/>
             </a:avLst>
           </a:prstGeom>
           <a:solidFill>
@@ -6229,14 +6855,14 @@
       </p:sp>
       <p:sp>
         <p:nvSpPr>
-          <p:cNvPr id="9" name="Text 7"/>
-          <p:cNvSpPr/>
-          <p:nvPr/>
-        </p:nvSpPr>
-        <p:spPr>
-          <a:xfrm>
-            <a:off x="1143000" y="2724912"/>
-            <a:ext cx="3291840" cy="146304"/>
+          <p:cNvPr id="13" name="Text 11"/>
+          <p:cNvSpPr/>
+          <p:nvPr/>
+        </p:nvSpPr>
+        <p:spPr>
+          <a:xfrm>
+            <a:off x="6099048" y="2779776"/>
+            <a:ext cx="1298448" cy="128016"/>
           </a:xfrm>
           <a:prstGeom prst="rect">
             <a:avLst/>
@@ -6252,96 +6878,30 @@
               <a:buNone/>
             </a:pPr>
             <a:r>
-              <a:rPr lang="en-US" sz="950" b="1" dirty="0">
-                <a:solidFill>
-                  <a:srgbClr val="4C1D95"/>
-                </a:solidFill>
-                <a:latin typeface="Inter" pitchFamily="34" charset="0"/>
-                <a:ea typeface="Inter" pitchFamily="34" charset="-122"/>
-                <a:cs typeface="Inter" pitchFamily="34" charset="-120"/>
-              </a:rPr>
-              <a:t>IF YOU HEAR A RUMOR OR RECEIVE NOTICE</a:t>
-            </a:r>
-            <a:endParaRPr lang="en-US" sz="950" dirty="0"/>
-          </a:p>
-        </p:txBody>
-      </p:sp>
-      <p:sp>
-        <p:nvSpPr>
-          <p:cNvPr id="10" name="Shape 8"/>
-          <p:cNvSpPr/>
-          <p:nvPr/>
-        </p:nvSpPr>
-        <p:spPr>
-          <a:xfrm>
-            <a:off x="1143000" y="3154680"/>
-            <a:ext cx="310896" cy="310896"/>
-          </a:xfrm>
-          <a:prstGeom prst="ellipse">
-            <a:avLst/>
-          </a:prstGeom>
-          <a:solidFill>
-            <a:srgbClr val="6D28D9"/>
-          </a:solidFill>
-          <a:ln w="12700">
-            <a:solidFill>
-              <a:srgbClr val="6D28D9">
-                <a:alpha val="0"/>
-              </a:srgbClr>
-            </a:solidFill>
-            <a:prstDash val="solid"/>
-          </a:ln>
-        </p:spPr>
-      </p:sp>
-      <p:sp>
-        <p:nvSpPr>
-          <p:cNvPr id="11" name="Text 9"/>
-          <p:cNvSpPr/>
-          <p:nvPr/>
-        </p:nvSpPr>
-        <p:spPr>
-          <a:xfrm>
-            <a:off x="1143000" y="3236976"/>
-            <a:ext cx="310896" cy="109728"/>
-          </a:xfrm>
-          <a:prstGeom prst="rect">
-            <a:avLst/>
-          </a:prstGeom>
-          <a:noFill/>
-          <a:ln/>
-        </p:spPr>
-        <p:txBody>
-          <a:bodyPr wrap="square" lIns="0" tIns="0" rIns="0" bIns="0" rtlCol="0" anchor="ctr"/>
-          <a:lstStyle/>
-          <a:p>
-            <a:pPr algn="ctr" indent="0" marL="0">
-              <a:buNone/>
-            </a:pPr>
-            <a:r>
-              <a:rPr lang="en-US" sz="980" b="1" dirty="0">
-                <a:solidFill>
-                  <a:srgbClr val="FFFFFF"/>
-                </a:solidFill>
-                <a:latin typeface="Inter" pitchFamily="34" charset="0"/>
-                <a:ea typeface="Inter" pitchFamily="34" charset="-122"/>
-                <a:cs typeface="Inter" pitchFamily="34" charset="-120"/>
-              </a:rPr>
-              <a:t>1</a:t>
-            </a:r>
-            <a:endParaRPr lang="en-US" sz="980" dirty="0"/>
-          </a:p>
-        </p:txBody>
-      </p:sp>
-      <p:sp>
-        <p:nvSpPr>
-          <p:cNvPr id="12" name="Text 10"/>
-          <p:cNvSpPr/>
-          <p:nvPr/>
-        </p:nvSpPr>
-        <p:spPr>
-          <a:xfrm>
-            <a:off x="1618488" y="3127248"/>
-            <a:ext cx="3200400" cy="256032"/>
+              <a:rPr lang="en-US" sz="880" b="1" dirty="0">
+                <a:solidFill>
+                  <a:srgbClr val="6D28D9"/>
+                </a:solidFill>
+                <a:latin typeface="Inter" pitchFamily="34" charset="0"/>
+                <a:ea typeface="Inter" pitchFamily="34" charset="-122"/>
+                <a:cs typeface="Inter" pitchFamily="34" charset="-120"/>
+              </a:rPr>
+              <a:t>Art. 44 Sec. 3(A)</a:t>
+            </a:r>
+            <a:endParaRPr lang="en-US" sz="880" dirty="0"/>
+          </a:p>
+        </p:txBody>
+      </p:sp>
+      <p:sp>
+        <p:nvSpPr>
+          <p:cNvPr id="14" name="Text 12"/>
+          <p:cNvSpPr/>
+          <p:nvPr/>
+        </p:nvSpPr>
+        <p:spPr>
+          <a:xfrm>
+            <a:off x="6099048" y="2990088"/>
+            <a:ext cx="1554480" cy="201168"/>
           </a:xfrm>
           <a:prstGeom prst="rect">
             <a:avLst/>
@@ -6359,83 +6919,17 @@
               <a:buNone/>
             </a:pPr>
             <a:r>
-              <a:rPr lang="en-US" sz="1750" b="1" dirty="0">
-                <a:solidFill>
-                  <a:srgbClr val="1F2937"/>
-                </a:solidFill>
-                <a:latin typeface="Inter" pitchFamily="34" charset="0"/>
-                <a:ea typeface="Inter" pitchFamily="34" charset="-122"/>
-                <a:cs typeface="Inter" pitchFamily="34" charset="-120"/>
-              </a:rPr>
-              <a:t>Contact our union.</a:t>
-            </a:r>
-            <a:endParaRPr lang="en-US" sz="1750" dirty="0"/>
-          </a:p>
-        </p:txBody>
-      </p:sp>
-      <p:sp>
-        <p:nvSpPr>
-          <p:cNvPr id="13" name="Shape 11"/>
-          <p:cNvSpPr/>
-          <p:nvPr/>
-        </p:nvSpPr>
-        <p:spPr>
-          <a:xfrm>
-            <a:off x="1143000" y="3703320"/>
-            <a:ext cx="310896" cy="310896"/>
-          </a:xfrm>
-          <a:prstGeom prst="ellipse">
-            <a:avLst/>
-          </a:prstGeom>
-          <a:solidFill>
-            <a:srgbClr val="6D28D9"/>
-          </a:solidFill>
-          <a:ln w="12700">
-            <a:solidFill>
-              <a:srgbClr val="6D28D9">
-                <a:alpha val="0"/>
-              </a:srgbClr>
-            </a:solidFill>
-            <a:prstDash val="solid"/>
-          </a:ln>
-        </p:spPr>
-      </p:sp>
-      <p:sp>
-        <p:nvSpPr>
-          <p:cNvPr id="14" name="Text 12"/>
-          <p:cNvSpPr/>
-          <p:nvPr/>
-        </p:nvSpPr>
-        <p:spPr>
-          <a:xfrm>
-            <a:off x="1143000" y="3785616"/>
-            <a:ext cx="310896" cy="109728"/>
-          </a:xfrm>
-          <a:prstGeom prst="rect">
-            <a:avLst/>
-          </a:prstGeom>
-          <a:noFill/>
-          <a:ln/>
-        </p:spPr>
-        <p:txBody>
-          <a:bodyPr wrap="square" lIns="0" tIns="0" rIns="0" bIns="0" rtlCol="0" anchor="ctr"/>
-          <a:lstStyle/>
-          <a:p>
-            <a:pPr algn="ctr" indent="0" marL="0">
-              <a:buNone/>
-            </a:pPr>
-            <a:r>
-              <a:rPr lang="en-US" sz="980" b="1" dirty="0">
-                <a:solidFill>
-                  <a:srgbClr val="FFFFFF"/>
-                </a:solidFill>
-                <a:latin typeface="Inter" pitchFamily="34" charset="0"/>
-                <a:ea typeface="Inter" pitchFamily="34" charset="-122"/>
-                <a:cs typeface="Inter" pitchFamily="34" charset="-120"/>
-              </a:rPr>
-              <a:t>2</a:t>
-            </a:r>
-            <a:endParaRPr lang="en-US" sz="980" dirty="0"/>
+              <a:rPr lang="en-US" sz="2020" b="1" dirty="0">
+                <a:solidFill>
+                  <a:srgbClr val="4C1D95"/>
+                </a:solidFill>
+                <a:latin typeface="Lora" pitchFamily="34" charset="0"/>
+                <a:ea typeface="Lora" pitchFamily="34" charset="-122"/>
+                <a:cs typeface="Lora" pitchFamily="34" charset="-120"/>
+              </a:rPr>
+              <a:t>Five work days</a:t>
+            </a:r>
+            <a:endParaRPr lang="en-US" sz="2020" dirty="0"/>
           </a:p>
         </p:txBody>
       </p:sp>
@@ -6447,8 +6941,8 @@
         </p:nvSpPr>
         <p:spPr>
           <a:xfrm>
-            <a:off x="1618488" y="3675888"/>
-            <a:ext cx="3200400" cy="256032"/>
+            <a:off x="7772400" y="2852928"/>
+            <a:ext cx="2331720" cy="420624"/>
           </a:xfrm>
           <a:prstGeom prst="rect">
             <a:avLst/>
@@ -6466,7 +6960,7 @@
               <a:buNone/>
             </a:pPr>
             <a:r>
-              <a:rPr lang="en-US" sz="1750" b="1" dirty="0">
+              <a:rPr lang="en-US" sz="1250" dirty="0">
                 <a:solidFill>
                   <a:srgbClr val="1F2937"/>
                 </a:solidFill>
@@ -6474,9 +6968,9 @@
                 <a:ea typeface="Inter" pitchFamily="34" charset="-122"/>
                 <a:cs typeface="Inter" pitchFamily="34" charset="-120"/>
               </a:rPr>
-              <a:t>Talk with a steward.</a:t>
-            </a:r>
-            <a:endParaRPr lang="en-US" sz="1750" dirty="0"/>
+              <a:t>After notice, choose the full process or direct layoff/recall.</a:t>
+            </a:r>
+            <a:endParaRPr lang="en-US" sz="1250" dirty="0"/>
           </a:p>
         </p:txBody>
       </p:sp>
@@ -6488,333 +6982,12 @@
         </p:nvSpPr>
         <p:spPr>
           <a:xfrm>
-            <a:off x="1143000" y="4251960"/>
-            <a:ext cx="310896" cy="310896"/>
-          </a:xfrm>
-          <a:prstGeom prst="ellipse">
-            <a:avLst/>
-          </a:prstGeom>
-          <a:solidFill>
-            <a:srgbClr val="6D28D9"/>
-          </a:solidFill>
-          <a:ln w="12700">
-            <a:solidFill>
-              <a:srgbClr val="6D28D9">
-                <a:alpha val="0"/>
-              </a:srgbClr>
-            </a:solidFill>
-            <a:prstDash val="solid"/>
-          </a:ln>
-        </p:spPr>
-      </p:sp>
-      <p:sp>
-        <p:nvSpPr>
-          <p:cNvPr id="17" name="Text 15"/>
-          <p:cNvSpPr/>
-          <p:nvPr/>
-        </p:nvSpPr>
-        <p:spPr>
-          <a:xfrm>
-            <a:off x="1143000" y="4334256"/>
-            <a:ext cx="310896" cy="109728"/>
-          </a:xfrm>
-          <a:prstGeom prst="rect">
-            <a:avLst/>
-          </a:prstGeom>
-          <a:noFill/>
-          <a:ln/>
-        </p:spPr>
-        <p:txBody>
-          <a:bodyPr wrap="square" lIns="0" tIns="0" rIns="0" bIns="0" rtlCol="0" anchor="ctr"/>
-          <a:lstStyle/>
-          <a:p>
-            <a:pPr algn="ctr" indent="0" marL="0">
-              <a:buNone/>
-            </a:pPr>
-            <a:r>
-              <a:rPr lang="en-US" sz="980" b="1" dirty="0">
-                <a:solidFill>
-                  <a:srgbClr val="FFFFFF"/>
-                </a:solidFill>
-                <a:latin typeface="Inter" pitchFamily="34" charset="0"/>
-                <a:ea typeface="Inter" pitchFamily="34" charset="-122"/>
-                <a:cs typeface="Inter" pitchFamily="34" charset="-120"/>
-              </a:rPr>
-              <a:t>3</a:t>
-            </a:r>
-            <a:endParaRPr lang="en-US" sz="980" dirty="0"/>
-          </a:p>
-        </p:txBody>
-      </p:sp>
-      <p:sp>
-        <p:nvSpPr>
-          <p:cNvPr id="18" name="Text 16"/>
-          <p:cNvSpPr/>
-          <p:nvPr/>
-        </p:nvSpPr>
-        <p:spPr>
-          <a:xfrm>
-            <a:off x="1618488" y="4224528"/>
-            <a:ext cx="3200400" cy="256032"/>
-          </a:xfrm>
-          <a:prstGeom prst="rect">
-            <a:avLst/>
-          </a:prstGeom>
-          <a:noFill/>
-          <a:ln/>
-        </p:spPr>
-        <p:txBody>
-          <a:bodyPr wrap="square" lIns="0" tIns="0" rIns="0" bIns="0" rtlCol="0" anchor="ctr">
-            <a:normAutofit/>
-          </a:bodyPr>
-          <a:lstStyle/>
-          <a:p>
-            <a:pPr indent="0" marL="0">
-              <a:buNone/>
-            </a:pPr>
-            <a:r>
-              <a:rPr lang="en-US" sz="1750" b="1" dirty="0">
-                <a:solidFill>
-                  <a:srgbClr val="1F2937"/>
-                </a:solidFill>
-                <a:latin typeface="Inter" pitchFamily="34" charset="0"/>
-                <a:ea typeface="Inter" pitchFamily="34" charset="-122"/>
-                <a:cs typeface="Inter" pitchFamily="34" charset="-120"/>
-              </a:rPr>
-              <a:t>Keep records and dates.</a:t>
-            </a:r>
-            <a:endParaRPr lang="en-US" sz="1750" dirty="0"/>
-          </a:p>
-        </p:txBody>
-      </p:sp>
-      <p:sp>
-        <p:nvSpPr>
-          <p:cNvPr id="19" name="Shape 17"/>
-          <p:cNvSpPr/>
-          <p:nvPr/>
-        </p:nvSpPr>
-        <p:spPr>
-          <a:xfrm>
-            <a:off x="1143000" y="4800600"/>
-            <a:ext cx="310896" cy="310896"/>
-          </a:xfrm>
-          <a:prstGeom prst="ellipse">
-            <a:avLst/>
-          </a:prstGeom>
-          <a:solidFill>
-            <a:srgbClr val="6D28D9"/>
-          </a:solidFill>
-          <a:ln w="12700">
-            <a:solidFill>
-              <a:srgbClr val="6D28D9">
-                <a:alpha val="0"/>
-              </a:srgbClr>
-            </a:solidFill>
-            <a:prstDash val="solid"/>
-          </a:ln>
-        </p:spPr>
-      </p:sp>
-      <p:sp>
-        <p:nvSpPr>
-          <p:cNvPr id="20" name="Text 18"/>
-          <p:cNvSpPr/>
-          <p:nvPr/>
-        </p:nvSpPr>
-        <p:spPr>
-          <a:xfrm>
-            <a:off x="1143000" y="4882896"/>
-            <a:ext cx="310896" cy="109728"/>
-          </a:xfrm>
-          <a:prstGeom prst="rect">
-            <a:avLst/>
-          </a:prstGeom>
-          <a:noFill/>
-          <a:ln/>
-        </p:spPr>
-        <p:txBody>
-          <a:bodyPr wrap="square" lIns="0" tIns="0" rIns="0" bIns="0" rtlCol="0" anchor="ctr"/>
-          <a:lstStyle/>
-          <a:p>
-            <a:pPr algn="ctr" indent="0" marL="0">
-              <a:buNone/>
-            </a:pPr>
-            <a:r>
-              <a:rPr lang="en-US" sz="980" b="1" dirty="0">
-                <a:solidFill>
-                  <a:srgbClr val="FFFFFF"/>
-                </a:solidFill>
-                <a:latin typeface="Inter" pitchFamily="34" charset="0"/>
-                <a:ea typeface="Inter" pitchFamily="34" charset="-122"/>
-                <a:cs typeface="Inter" pitchFamily="34" charset="-120"/>
-              </a:rPr>
-              <a:t>4</a:t>
-            </a:r>
-            <a:endParaRPr lang="en-US" sz="980" dirty="0"/>
-          </a:p>
-        </p:txBody>
-      </p:sp>
-      <p:sp>
-        <p:nvSpPr>
-          <p:cNvPr id="21" name="Text 19"/>
-          <p:cNvSpPr/>
-          <p:nvPr/>
-        </p:nvSpPr>
-        <p:spPr>
-          <a:xfrm>
-            <a:off x="1618488" y="4773168"/>
-            <a:ext cx="3200400" cy="256032"/>
-          </a:xfrm>
-          <a:prstGeom prst="rect">
-            <a:avLst/>
-          </a:prstGeom>
-          <a:noFill/>
-          <a:ln/>
-        </p:spPr>
-        <p:txBody>
-          <a:bodyPr wrap="square" lIns="0" tIns="0" rIns="0" bIns="0" rtlCol="0" anchor="ctr">
-            <a:normAutofit/>
-          </a:bodyPr>
-          <a:lstStyle/>
-          <a:p>
-            <a:pPr indent="0" marL="0">
-              <a:buNone/>
-            </a:pPr>
-            <a:r>
-              <a:rPr lang="en-US" sz="1750" b="1" dirty="0">
-                <a:solidFill>
-                  <a:srgbClr val="1F2937"/>
-                </a:solidFill>
-                <a:latin typeface="Inter" pitchFamily="34" charset="0"/>
-                <a:ea typeface="Inter" pitchFamily="34" charset="-122"/>
-                <a:cs typeface="Inter" pitchFamily="34" charset="-120"/>
-              </a:rPr>
-              <a:t>Do not navigate it alone.</a:t>
-            </a:r>
-            <a:endParaRPr lang="en-US" sz="1750" dirty="0"/>
-          </a:p>
-        </p:txBody>
-      </p:sp>
-      <p:sp>
-        <p:nvSpPr>
-          <p:cNvPr id="22" name="Shape 20"/>
-          <p:cNvSpPr/>
-          <p:nvPr/>
-        </p:nvSpPr>
-        <p:spPr>
-          <a:xfrm>
-            <a:off x="5724144" y="2450592"/>
-            <a:ext cx="5084064" cy="3017520"/>
+            <a:off x="822960" y="3877056"/>
+            <a:ext cx="4617720" cy="987552"/>
           </a:xfrm>
           <a:prstGeom prst="roundRect">
             <a:avLst>
-              <a:gd name="adj" fmla="val 2424"/>
-            </a:avLst>
-          </a:prstGeom>
-          <a:solidFill>
-            <a:srgbClr val="F5F3FF"/>
-          </a:solidFill>
-          <a:ln w="12700">
-            <a:solidFill>
-              <a:srgbClr val="EDE9FE"/>
-            </a:solidFill>
-            <a:prstDash val="solid"/>
-          </a:ln>
-        </p:spPr>
-      </p:sp>
-      <p:sp>
-        <p:nvSpPr>
-          <p:cNvPr id="23" name="Text 21"/>
-          <p:cNvSpPr/>
-          <p:nvPr/>
-        </p:nvSpPr>
-        <p:spPr>
-          <a:xfrm>
-            <a:off x="6053328" y="2788920"/>
-            <a:ext cx="4224528" cy="237744"/>
-          </a:xfrm>
-          <a:prstGeom prst="rect">
-            <a:avLst/>
-          </a:prstGeom>
-          <a:noFill/>
-          <a:ln/>
-        </p:spPr>
-        <p:txBody>
-          <a:bodyPr wrap="square" lIns="0" tIns="0" rIns="0" bIns="0" rtlCol="0" anchor="ctr"/>
-          <a:lstStyle/>
-          <a:p>
-            <a:pPr indent="0" marL="0">
-              <a:buNone/>
-            </a:pPr>
-            <a:r>
-              <a:rPr lang="en-US" sz="2400" b="1" dirty="0">
-                <a:solidFill>
-                  <a:srgbClr val="4C1D95"/>
-                </a:solidFill>
-                <a:latin typeface="Lora" pitchFamily="34" charset="0"/>
-                <a:ea typeface="Lora" pitchFamily="34" charset="-122"/>
-                <a:cs typeface="Lora" pitchFamily="34" charset="-120"/>
-              </a:rPr>
-              <a:t>Why this belongs in the rally frame</a:t>
-            </a:r>
-            <a:endParaRPr lang="en-US" sz="2400" dirty="0"/>
-          </a:p>
-        </p:txBody>
-      </p:sp>
-      <p:sp>
-        <p:nvSpPr>
-          <p:cNvPr id="24" name="Text 22"/>
-          <p:cNvSpPr/>
-          <p:nvPr/>
-        </p:nvSpPr>
-        <p:spPr>
-          <a:xfrm>
-            <a:off x="6053328" y="3401568"/>
-            <a:ext cx="4187952" cy="1152144"/>
-          </a:xfrm>
-          <a:prstGeom prst="rect">
-            <a:avLst/>
-          </a:prstGeom>
-          <a:noFill/>
-          <a:ln/>
-        </p:spPr>
-        <p:txBody>
-          <a:bodyPr wrap="square" lIns="0" tIns="0" rIns="0" bIns="0" rtlCol="0" anchor="ctr">
-            <a:normAutofit/>
-          </a:bodyPr>
-          <a:lstStyle/>
-          <a:p>
-            <a:pPr indent="0" marL="0">
-              <a:buNone/>
-            </a:pPr>
-            <a:r>
-              <a:rPr lang="en-US" sz="1800" b="1" dirty="0">
-                <a:solidFill>
-                  <a:srgbClr val="1F2937"/>
-                </a:solidFill>
-                <a:latin typeface="Inter" pitchFamily="34" charset="0"/>
-                <a:ea typeface="Inter" pitchFamily="34" charset="-122"/>
-                <a:cs typeface="Inter" pitchFamily="34" charset="-120"/>
-              </a:rPr>
-              <a:t>Layoff language, timelines, bumping rights, and enforcement matter because job security is not automatic. Members protect it by knowing our rights and showing up together.</a:t>
-            </a:r>
-            <a:endParaRPr lang="en-US" sz="1800" dirty="0"/>
-          </a:p>
-        </p:txBody>
-      </p:sp>
-      <p:sp>
-        <p:nvSpPr>
-          <p:cNvPr id="25" name="Shape 23"/>
-          <p:cNvSpPr/>
-          <p:nvPr/>
-        </p:nvSpPr>
-        <p:spPr>
-          <a:xfrm>
-            <a:off x="6446520" y="4882896"/>
-            <a:ext cx="3273552" cy="457200"/>
-          </a:xfrm>
-          <a:prstGeom prst="roundRect">
-            <a:avLst>
-              <a:gd name="adj" fmla="val 16000"/>
+              <a:gd name="adj" fmla="val 7407"/>
             </a:avLst>
           </a:prstGeom>
           <a:solidFill>
@@ -6822,7 +6995,7 @@
           </a:solidFill>
           <a:ln w="12700">
             <a:solidFill>
-              <a:srgbClr val="FFFFFF"/>
+              <a:srgbClr val="E5E7EB"/>
             </a:solidFill>
             <a:prstDash val="solid"/>
           </a:ln>
@@ -6830,14 +7003,53 @@
       </p:sp>
       <p:sp>
         <p:nvSpPr>
-          <p:cNvPr id="26" name="Text 24"/>
-          <p:cNvSpPr/>
-          <p:nvPr/>
-        </p:nvSpPr>
-        <p:spPr>
-          <a:xfrm>
-            <a:off x="6556248" y="5001768"/>
-            <a:ext cx="3054096" cy="146304"/>
+          <p:cNvPr id="17" name="Text 15"/>
+          <p:cNvSpPr/>
+          <p:nvPr/>
+        </p:nvSpPr>
+        <p:spPr>
+          <a:xfrm>
+            <a:off x="1051560" y="4023360"/>
+            <a:ext cx="1298448" cy="128016"/>
+          </a:xfrm>
+          <a:prstGeom prst="rect">
+            <a:avLst/>
+          </a:prstGeom>
+          <a:noFill/>
+          <a:ln/>
+        </p:spPr>
+        <p:txBody>
+          <a:bodyPr wrap="square" lIns="0" tIns="0" rIns="0" bIns="0" rtlCol="0" anchor="ctr"/>
+          <a:lstStyle/>
+          <a:p>
+            <a:pPr indent="0" marL="0">
+              <a:buNone/>
+            </a:pPr>
+            <a:r>
+              <a:rPr lang="en-US" sz="880" b="1" dirty="0">
+                <a:solidFill>
+                  <a:srgbClr val="6D28D9"/>
+                </a:solidFill>
+                <a:latin typeface="Inter" pitchFamily="34" charset="0"/>
+                <a:ea typeface="Inter" pitchFamily="34" charset="-122"/>
+                <a:cs typeface="Inter" pitchFamily="34" charset="-120"/>
+              </a:rPr>
+              <a:t>Art. 44 Secs. 3(E), 3(F)</a:t>
+            </a:r>
+            <a:endParaRPr lang="en-US" sz="880" dirty="0"/>
+          </a:p>
+        </p:txBody>
+      </p:sp>
+      <p:sp>
+        <p:nvSpPr>
+          <p:cNvPr id="18" name="Text 16"/>
+          <p:cNvSpPr/>
+          <p:nvPr/>
+        </p:nvSpPr>
+        <p:spPr>
+          <a:xfrm>
+            <a:off x="1051560" y="4233672"/>
+            <a:ext cx="1554480" cy="201168"/>
           </a:xfrm>
           <a:prstGeom prst="rect">
             <a:avLst/>
@@ -6851,21 +7063,319 @@
           </a:bodyPr>
           <a:lstStyle/>
           <a:p>
+            <a:pPr indent="0" marL="0">
+              <a:buNone/>
+            </a:pPr>
+            <a:r>
+              <a:rPr lang="en-US" sz="2020" b="1" dirty="0">
+                <a:solidFill>
+                  <a:srgbClr val="4C1D95"/>
+                </a:solidFill>
+                <a:latin typeface="Lora" pitchFamily="34" charset="0"/>
+                <a:ea typeface="Lora" pitchFamily="34" charset="-122"/>
+                <a:cs typeface="Lora" pitchFamily="34" charset="-120"/>
+              </a:rPr>
+              <a:t>Placement first</a:t>
+            </a:r>
+            <a:endParaRPr lang="en-US" sz="2020" dirty="0"/>
+          </a:p>
+        </p:txBody>
+      </p:sp>
+      <p:sp>
+        <p:nvSpPr>
+          <p:cNvPr id="19" name="Text 17"/>
+          <p:cNvSpPr/>
+          <p:nvPr/>
+        </p:nvSpPr>
+        <p:spPr>
+          <a:xfrm>
+            <a:off x="2724912" y="4096512"/>
+            <a:ext cx="2331720" cy="420624"/>
+          </a:xfrm>
+          <a:prstGeom prst="rect">
+            <a:avLst/>
+          </a:prstGeom>
+          <a:noFill/>
+          <a:ln/>
+        </p:spPr>
+        <p:txBody>
+          <a:bodyPr wrap="square" lIns="0" tIns="0" rIns="0" bIns="0" rtlCol="0" anchor="ctr">
+            <a:normAutofit/>
+          </a:bodyPr>
+          <a:lstStyle/>
+          <a:p>
+            <a:pPr indent="0" marL="0">
+              <a:buNone/>
+            </a:pPr>
+            <a:r>
+              <a:rPr lang="en-US" sz="1250" dirty="0">
+                <a:solidFill>
+                  <a:srgbClr val="1F2937"/>
+                </a:solidFill>
+                <a:latin typeface="Inter" pitchFamily="34" charset="0"/>
+                <a:ea typeface="Inter" pitchFamily="34" charset="-122"/>
+                <a:cs typeface="Inter" pitchFamily="34" charset="-120"/>
+              </a:rPr>
+              <a:t>Vacant jobs come before bumping; employee must be position-qualified.</a:t>
+            </a:r>
+            <a:endParaRPr lang="en-US" sz="1250" dirty="0"/>
+          </a:p>
+        </p:txBody>
+      </p:sp>
+      <p:sp>
+        <p:nvSpPr>
+          <p:cNvPr id="20" name="Shape 18"/>
+          <p:cNvSpPr/>
+          <p:nvPr/>
+        </p:nvSpPr>
+        <p:spPr>
+          <a:xfrm>
+            <a:off x="5870448" y="3877056"/>
+            <a:ext cx="4617720" cy="987552"/>
+          </a:xfrm>
+          <a:prstGeom prst="roundRect">
+            <a:avLst>
+              <a:gd name="adj" fmla="val 7407"/>
+            </a:avLst>
+          </a:prstGeom>
+          <a:solidFill>
+            <a:srgbClr val="FFFFFF"/>
+          </a:solidFill>
+          <a:ln w="12700">
+            <a:solidFill>
+              <a:srgbClr val="E5E7EB"/>
+            </a:solidFill>
+            <a:prstDash val="solid"/>
+          </a:ln>
+        </p:spPr>
+      </p:sp>
+      <p:sp>
+        <p:nvSpPr>
+          <p:cNvPr id="21" name="Text 19"/>
+          <p:cNvSpPr/>
+          <p:nvPr/>
+        </p:nvSpPr>
+        <p:spPr>
+          <a:xfrm>
+            <a:off x="6099048" y="4023360"/>
+            <a:ext cx="1298448" cy="128016"/>
+          </a:xfrm>
+          <a:prstGeom prst="rect">
+            <a:avLst/>
+          </a:prstGeom>
+          <a:noFill/>
+          <a:ln/>
+        </p:spPr>
+        <p:txBody>
+          <a:bodyPr wrap="square" lIns="0" tIns="0" rIns="0" bIns="0" rtlCol="0" anchor="ctr"/>
+          <a:lstStyle/>
+          <a:p>
+            <a:pPr indent="0" marL="0">
+              <a:buNone/>
+            </a:pPr>
+            <a:r>
+              <a:rPr lang="en-US" sz="880" b="1" dirty="0">
+                <a:solidFill>
+                  <a:srgbClr val="6D28D9"/>
+                </a:solidFill>
+                <a:latin typeface="Inter" pitchFamily="34" charset="0"/>
+                <a:ea typeface="Inter" pitchFamily="34" charset="-122"/>
+                <a:cs typeface="Inter" pitchFamily="34" charset="-120"/>
+              </a:rPr>
+              <a:t>Art. 44 Secs. 9-10</a:t>
+            </a:r>
+            <a:endParaRPr lang="en-US" sz="880" dirty="0"/>
+          </a:p>
+        </p:txBody>
+      </p:sp>
+      <p:sp>
+        <p:nvSpPr>
+          <p:cNvPr id="22" name="Text 20"/>
+          <p:cNvSpPr/>
+          <p:nvPr/>
+        </p:nvSpPr>
+        <p:spPr>
+          <a:xfrm>
+            <a:off x="6099048" y="4233672"/>
+            <a:ext cx="1554480" cy="201168"/>
+          </a:xfrm>
+          <a:prstGeom prst="rect">
+            <a:avLst/>
+          </a:prstGeom>
+          <a:noFill/>
+          <a:ln/>
+        </p:spPr>
+        <p:txBody>
+          <a:bodyPr wrap="square" lIns="0" tIns="0" rIns="0" bIns="0" rtlCol="0" anchor="ctr">
+            <a:normAutofit/>
+          </a:bodyPr>
+          <a:lstStyle/>
+          <a:p>
+            <a:pPr indent="0" marL="0">
+              <a:buNone/>
+            </a:pPr>
+            <a:r>
+              <a:rPr lang="en-US" sz="2020" b="1" dirty="0">
+                <a:solidFill>
+                  <a:srgbClr val="4C1D95"/>
+                </a:solidFill>
+                <a:latin typeface="Lora" pitchFamily="34" charset="0"/>
+                <a:ea typeface="Lora" pitchFamily="34" charset="-122"/>
+                <a:cs typeface="Lora" pitchFamily="34" charset="-120"/>
+              </a:rPr>
+              <a:t>Recall rights</a:t>
+            </a:r>
+            <a:endParaRPr lang="en-US" sz="2020" dirty="0"/>
+          </a:p>
+        </p:txBody>
+      </p:sp>
+      <p:sp>
+        <p:nvSpPr>
+          <p:cNvPr id="23" name="Text 21"/>
+          <p:cNvSpPr/>
+          <p:nvPr/>
+        </p:nvSpPr>
+        <p:spPr>
+          <a:xfrm>
+            <a:off x="7772400" y="4096512"/>
+            <a:ext cx="2331720" cy="420624"/>
+          </a:xfrm>
+          <a:prstGeom prst="rect">
+            <a:avLst/>
+          </a:prstGeom>
+          <a:noFill/>
+          <a:ln/>
+        </p:spPr>
+        <p:txBody>
+          <a:bodyPr wrap="square" lIns="0" tIns="0" rIns="0" bIns="0" rtlCol="0" anchor="ctr">
+            <a:normAutofit/>
+          </a:bodyPr>
+          <a:lstStyle/>
+          <a:p>
+            <a:pPr indent="0" marL="0">
+              <a:buNone/>
+            </a:pPr>
+            <a:r>
+              <a:rPr lang="en-US" sz="1250" dirty="0">
+                <a:solidFill>
+                  <a:srgbClr val="1F2937"/>
+                </a:solidFill>
+                <a:latin typeface="Inter" pitchFamily="34" charset="0"/>
+                <a:ea typeface="Inter" pitchFamily="34" charset="-122"/>
+                <a:cs typeface="Inter" pitchFamily="34" charset="-120"/>
+              </a:rPr>
+              <a:t>Recall lists use classification, employment category, geography, and seniority.</a:t>
+            </a:r>
+            <a:endParaRPr lang="en-US" sz="1250" dirty="0"/>
+          </a:p>
+        </p:txBody>
+      </p:sp>
+      <p:sp>
+        <p:nvSpPr>
+          <p:cNvPr id="24" name="Shape 22"/>
+          <p:cNvSpPr/>
+          <p:nvPr/>
+        </p:nvSpPr>
+        <p:spPr>
+          <a:xfrm>
+            <a:off x="822960" y="5321808"/>
+            <a:ext cx="9665208" cy="493776"/>
+          </a:xfrm>
+          <a:prstGeom prst="roundRect">
+            <a:avLst>
+              <a:gd name="adj" fmla="val 14815"/>
+            </a:avLst>
+          </a:prstGeom>
+          <a:solidFill>
+            <a:srgbClr val="4C1D95"/>
+          </a:solidFill>
+          <a:ln w="12700">
+            <a:solidFill>
+              <a:srgbClr val="4C1D95"/>
+            </a:solidFill>
+            <a:prstDash val="solid"/>
+          </a:ln>
+        </p:spPr>
+      </p:sp>
+      <p:sp>
+        <p:nvSpPr>
+          <p:cNvPr id="25" name="Text 23"/>
+          <p:cNvSpPr/>
+          <p:nvPr/>
+        </p:nvSpPr>
+        <p:spPr>
+          <a:xfrm>
+            <a:off x="1078992" y="5477256"/>
+            <a:ext cx="9144000" cy="146304"/>
+          </a:xfrm>
+          <a:prstGeom prst="rect">
+            <a:avLst/>
+          </a:prstGeom>
+          <a:noFill/>
+          <a:ln/>
+        </p:spPr>
+        <p:txBody>
+          <a:bodyPr wrap="square" lIns="0" tIns="0" rIns="0" bIns="0" rtlCol="0" anchor="ctr">
+            <a:normAutofit/>
+          </a:bodyPr>
+          <a:lstStyle/>
+          <a:p>
             <a:pPr algn="ctr" indent="0" marL="0">
               <a:buNone/>
             </a:pPr>
             <a:r>
-              <a:rPr lang="en-US" sz="1300" b="1" dirty="0">
-                <a:solidFill>
-                  <a:srgbClr val="4C1D95"/>
-                </a:solidFill>
-                <a:latin typeface="Inter" pitchFamily="34" charset="0"/>
-                <a:ea typeface="Inter" pitchFamily="34" charset="-122"/>
-                <a:cs typeface="Inter" pitchFamily="34" charset="-120"/>
-              </a:rPr>
-              <a:t>083stewards@seiu503.org</a:t>
-            </a:r>
-            <a:endParaRPr lang="en-US" sz="1300" dirty="0"/>
+              <a:rPr lang="en-US" sz="1470" b="1" dirty="0">
+                <a:solidFill>
+                  <a:srgbClr val="FFFFFF"/>
+                </a:solidFill>
+                <a:latin typeface="Inter" pitchFamily="34" charset="0"/>
+                <a:ea typeface="Inter" pitchFamily="34" charset="-122"/>
+                <a:cs typeface="Inter" pitchFamily="34" charset="-120"/>
+              </a:rPr>
+              <a:t>If you receive a notice: contact a steward immediately, keep the notice, and track every deadline.</a:t>
+            </a:r>
+            <a:endParaRPr lang="en-US" sz="1470" dirty="0"/>
+          </a:p>
+        </p:txBody>
+      </p:sp>
+      <p:sp>
+        <p:nvSpPr>
+          <p:cNvPr id="26" name="Text 24"/>
+          <p:cNvSpPr/>
+          <p:nvPr/>
+        </p:nvSpPr>
+        <p:spPr>
+          <a:xfrm>
+            <a:off x="658368" y="6272784"/>
+            <a:ext cx="10872216" cy="146304"/>
+          </a:xfrm>
+          <a:prstGeom prst="rect">
+            <a:avLst/>
+          </a:prstGeom>
+          <a:noFill/>
+          <a:ln/>
+        </p:spPr>
+        <p:txBody>
+          <a:bodyPr wrap="square" lIns="0" tIns="0" rIns="0" bIns="0" rtlCol="0" anchor="ctr">
+            <a:normAutofit/>
+          </a:bodyPr>
+          <a:lstStyle/>
+          <a:p>
+            <a:pPr indent="0" marL="0">
+              <a:buNone/>
+            </a:pPr>
+            <a:r>
+              <a:rPr lang="en-US" sz="840" dirty="0">
+                <a:solidFill>
+                  <a:srgbClr val="6B7280"/>
+                </a:solidFill>
+                <a:latin typeface="Inter" pitchFamily="34" charset="0"/>
+                <a:ea typeface="Inter" pitchFamily="34" charset="-122"/>
+                <a:cs typeface="Inter" pitchFamily="34" charset="-120"/>
+              </a:rPr>
+              <a:t>Source: SEIU/Oregon Public Universities CBA 2022-2026, Article 44 - Layoff, Secs. 1, 3(A), 3(E), 3(F), 9-10.</a:t>
+            </a:r>
+            <a:endParaRPr lang="en-US" sz="840" dirty="0"/>
           </a:p>
         </p:txBody>
       </p:sp>
@@ -7051,7 +7561,7 @@
                 <a:ea typeface="Inter" pitchFamily="34" charset="-122"/>
                 <a:cs typeface="Inter" pitchFamily="34" charset="-120"/>
               </a:rPr>
-              <a:t>Local 083 office</a:t>
+              <a:t>Layoff process</a:t>
             </a:r>
             <a:endParaRPr lang="en-US" sz="880" dirty="0"/>
           </a:p>
@@ -7152,7 +7662,7 @@
                 <a:ea typeface="Lora" pitchFamily="34" charset="-122"/>
                 <a:cs typeface="Lora" pitchFamily="34" charset="-120"/>
               </a:rPr>
-              <a:t>We have a new office</a:t>
+              <a:t>After notice: the short version</a:t>
             </a:r>
             <a:endParaRPr lang="en-US" sz="2614" dirty="0"/>
           </a:p>
@@ -7185,7 +7695,7 @@
               <a:buNone/>
             </a:pPr>
             <a:r>
-              <a:rPr lang="en-US" sz="1800" dirty="0">
+              <a:rPr lang="en-US" sz="1720" dirty="0">
                 <a:solidFill>
                   <a:srgbClr val="374151"/>
                 </a:solidFill>
@@ -7193,9 +7703,9 @@
                 <a:ea typeface="Inter" pitchFamily="34" charset="-122"/>
                 <a:cs typeface="Inter" pitchFamily="34" charset="-120"/>
               </a:rPr>
-              <a:t>This is organizing capacity: a place for questions, planning, outreach, and member follow-up.</a:t>
-            </a:r>
-            <a:endParaRPr lang="en-US" sz="1800" dirty="0"/>
+              <a:t>The process is not automatic protection. Members have to answer quickly and use the contract.</a:t>
+            </a:r>
+            <a:endParaRPr lang="en-US" sz="1720" dirty="0"/>
           </a:p>
         </p:txBody>
       </p:sp>
@@ -7207,12 +7717,267 @@
         </p:nvSpPr>
         <p:spPr>
           <a:xfrm>
-            <a:off x="822960" y="2560320"/>
-            <a:ext cx="9966960" cy="2697480"/>
+            <a:off x="685800" y="2487168"/>
+            <a:ext cx="1865376" cy="2084832"/>
           </a:xfrm>
           <a:prstGeom prst="roundRect">
             <a:avLst>
-              <a:gd name="adj" fmla="val 2712"/>
+              <a:gd name="adj" fmla="val 3922"/>
+            </a:avLst>
+          </a:prstGeom>
+          <a:solidFill>
+            <a:srgbClr val="F5F3FF"/>
+          </a:solidFill>
+          <a:ln w="12700">
+            <a:solidFill>
+              <a:srgbClr val="EDE9FE"/>
+            </a:solidFill>
+            <a:prstDash val="solid"/>
+          </a:ln>
+        </p:spPr>
+      </p:sp>
+      <p:sp>
+        <p:nvSpPr>
+          <p:cNvPr id="9" name="Shape 7"/>
+          <p:cNvSpPr/>
+          <p:nvPr/>
+        </p:nvSpPr>
+        <p:spPr>
+          <a:xfrm>
+            <a:off x="850392" y="2706624"/>
+            <a:ext cx="384048" cy="384048"/>
+          </a:xfrm>
+          <a:prstGeom prst="ellipse">
+            <a:avLst/>
+          </a:prstGeom>
+          <a:solidFill>
+            <a:srgbClr val="6D28D9"/>
+          </a:solidFill>
+          <a:ln w="12700">
+            <a:solidFill>
+              <a:srgbClr val="6D28D9">
+                <a:alpha val="0"/>
+              </a:srgbClr>
+            </a:solidFill>
+            <a:prstDash val="solid"/>
+          </a:ln>
+        </p:spPr>
+      </p:sp>
+      <p:sp>
+        <p:nvSpPr>
+          <p:cNvPr id="10" name="Text 8"/>
+          <p:cNvSpPr/>
+          <p:nvPr/>
+        </p:nvSpPr>
+        <p:spPr>
+          <a:xfrm>
+            <a:off x="850392" y="2825496"/>
+            <a:ext cx="384048" cy="109728"/>
+          </a:xfrm>
+          <a:prstGeom prst="rect">
+            <a:avLst/>
+          </a:prstGeom>
+          <a:noFill/>
+          <a:ln/>
+        </p:spPr>
+        <p:txBody>
+          <a:bodyPr wrap="square" lIns="0" tIns="0" rIns="0" bIns="0" rtlCol="0" anchor="ctr"/>
+          <a:lstStyle/>
+          <a:p>
+            <a:pPr algn="ctr" indent="0" marL="0">
+              <a:buNone/>
+            </a:pPr>
+            <a:r>
+              <a:rPr lang="en-US" sz="1020" b="1" dirty="0">
+                <a:solidFill>
+                  <a:srgbClr val="FFFFFF"/>
+                </a:solidFill>
+                <a:latin typeface="Inter" pitchFamily="34" charset="0"/>
+                <a:ea typeface="Inter" pitchFamily="34" charset="-122"/>
+                <a:cs typeface="Inter" pitchFamily="34" charset="-120"/>
+              </a:rPr>
+              <a:t>1</a:t>
+            </a:r>
+            <a:endParaRPr lang="en-US" sz="1020" dirty="0"/>
+          </a:p>
+        </p:txBody>
+      </p:sp>
+      <p:sp>
+        <p:nvSpPr>
+          <p:cNvPr id="11" name="Text 9"/>
+          <p:cNvSpPr/>
+          <p:nvPr/>
+        </p:nvSpPr>
+        <p:spPr>
+          <a:xfrm>
+            <a:off x="1344168" y="2761488"/>
+            <a:ext cx="987552" cy="201168"/>
+          </a:xfrm>
+          <a:prstGeom prst="rect">
+            <a:avLst/>
+          </a:prstGeom>
+          <a:noFill/>
+          <a:ln/>
+        </p:spPr>
+        <p:txBody>
+          <a:bodyPr wrap="square" lIns="0" tIns="0" rIns="0" bIns="0" rtlCol="0" anchor="ctr">
+            <a:normAutofit/>
+          </a:bodyPr>
+          <a:lstStyle/>
+          <a:p>
+            <a:pPr indent="0" marL="0">
+              <a:buNone/>
+            </a:pPr>
+            <a:r>
+              <a:rPr lang="en-US" sz="1880" b="1" dirty="0">
+                <a:solidFill>
+                  <a:srgbClr val="4C1D95"/>
+                </a:solidFill>
+                <a:latin typeface="Lora" pitchFamily="34" charset="0"/>
+                <a:ea typeface="Lora" pitchFamily="34" charset="-122"/>
+                <a:cs typeface="Lora" pitchFamily="34" charset="-120"/>
+              </a:rPr>
+              <a:t>Notice</a:t>
+            </a:r>
+            <a:endParaRPr lang="en-US" sz="1880" dirty="0"/>
+          </a:p>
+        </p:txBody>
+      </p:sp>
+      <p:sp>
+        <p:nvSpPr>
+          <p:cNvPr id="12" name="Text 10"/>
+          <p:cNvSpPr/>
+          <p:nvPr/>
+        </p:nvSpPr>
+        <p:spPr>
+          <a:xfrm>
+            <a:off x="886968" y="3401568"/>
+            <a:ext cx="1444752" cy="402336"/>
+          </a:xfrm>
+          <a:prstGeom prst="rect">
+            <a:avLst/>
+          </a:prstGeom>
+          <a:noFill/>
+          <a:ln/>
+        </p:spPr>
+        <p:txBody>
+          <a:bodyPr wrap="square" lIns="0" tIns="0" rIns="0" bIns="0" rtlCol="0" anchor="ctr">
+            <a:normAutofit/>
+          </a:bodyPr>
+          <a:lstStyle/>
+          <a:p>
+            <a:pPr indent="0" marL="0">
+              <a:buNone/>
+            </a:pPr>
+            <a:r>
+              <a:rPr lang="en-US" sz="1240" dirty="0">
+                <a:solidFill>
+                  <a:srgbClr val="1F2937"/>
+                </a:solidFill>
+                <a:latin typeface="Inter" pitchFamily="34" charset="0"/>
+                <a:ea typeface="Inter" pitchFamily="34" charset="-122"/>
+                <a:cs typeface="Inter" pitchFamily="34" charset="-120"/>
+              </a:rPr>
+              <a:t>Written notice + rights.</a:t>
+            </a:r>
+            <a:endParaRPr lang="en-US" sz="1240" dirty="0"/>
+          </a:p>
+        </p:txBody>
+      </p:sp>
+      <p:sp>
+        <p:nvSpPr>
+          <p:cNvPr id="13" name="Text 11"/>
+          <p:cNvSpPr/>
+          <p:nvPr/>
+        </p:nvSpPr>
+        <p:spPr>
+          <a:xfrm>
+            <a:off x="886968" y="4142232"/>
+            <a:ext cx="1444752" cy="128016"/>
+          </a:xfrm>
+          <a:prstGeom prst="rect">
+            <a:avLst/>
+          </a:prstGeom>
+          <a:noFill/>
+          <a:ln/>
+        </p:spPr>
+        <p:txBody>
+          <a:bodyPr wrap="square" lIns="0" tIns="0" rIns="0" bIns="0" rtlCol="0" anchor="ctr">
+            <a:normAutofit/>
+          </a:bodyPr>
+          <a:lstStyle/>
+          <a:p>
+            <a:pPr indent="0" marL="0">
+              <a:buNone/>
+            </a:pPr>
+            <a:r>
+              <a:rPr lang="en-US" sz="780" b="1" dirty="0">
+                <a:solidFill>
+                  <a:srgbClr val="6D28D9"/>
+                </a:solidFill>
+                <a:latin typeface="Inter" pitchFamily="34" charset="0"/>
+                <a:ea typeface="Inter" pitchFamily="34" charset="-122"/>
+                <a:cs typeface="Inter" pitchFamily="34" charset="-120"/>
+              </a:rPr>
+              <a:t>Art. 44 Sec. 1</a:t>
+            </a:r>
+            <a:endParaRPr lang="en-US" sz="780" dirty="0"/>
+          </a:p>
+        </p:txBody>
+      </p:sp>
+      <p:sp>
+        <p:nvSpPr>
+          <p:cNvPr id="14" name="Text 12"/>
+          <p:cNvSpPr/>
+          <p:nvPr/>
+        </p:nvSpPr>
+        <p:spPr>
+          <a:xfrm>
+            <a:off x="2606040" y="3246120"/>
+            <a:ext cx="228600" cy="256032"/>
+          </a:xfrm>
+          <a:prstGeom prst="rect">
+            <a:avLst/>
+          </a:prstGeom>
+          <a:noFill/>
+          <a:ln/>
+        </p:spPr>
+        <p:txBody>
+          <a:bodyPr wrap="square" lIns="0" tIns="0" rIns="0" bIns="0" rtlCol="0" anchor="ctr"/>
+          <a:lstStyle/>
+          <a:p>
+            <a:pPr algn="ctr" indent="0" marL="0">
+              <a:buNone/>
+            </a:pPr>
+            <a:r>
+              <a:rPr lang="en-US" sz="2200" b="1" dirty="0">
+                <a:solidFill>
+                  <a:srgbClr val="6D28D9"/>
+                </a:solidFill>
+                <a:latin typeface="Inter" pitchFamily="34" charset="0"/>
+                <a:ea typeface="Inter" pitchFamily="34" charset="-122"/>
+                <a:cs typeface="Inter" pitchFamily="34" charset="-120"/>
+              </a:rPr>
+              <a:t>&gt;</a:t>
+            </a:r>
+            <a:endParaRPr lang="en-US" sz="2200" dirty="0"/>
+          </a:p>
+        </p:txBody>
+      </p:sp>
+      <p:sp>
+        <p:nvSpPr>
+          <p:cNvPr id="15" name="Shape 13"/>
+          <p:cNvSpPr/>
+          <p:nvPr/>
+        </p:nvSpPr>
+        <p:spPr>
+          <a:xfrm>
+            <a:off x="2926080" y="2487168"/>
+            <a:ext cx="1865376" cy="2084832"/>
+          </a:xfrm>
+          <a:prstGeom prst="roundRect">
+            <a:avLst>
+              <a:gd name="adj" fmla="val 3922"/>
             </a:avLst>
           </a:prstGeom>
           <a:solidFill>
@@ -7228,22 +7993,250 @@
       </p:sp>
       <p:sp>
         <p:nvSpPr>
-          <p:cNvPr id="9" name="Shape 7"/>
-          <p:cNvSpPr/>
-          <p:nvPr/>
-        </p:nvSpPr>
-        <p:spPr>
-          <a:xfrm>
-            <a:off x="1234440" y="2999232"/>
-            <a:ext cx="2423160" cy="1243584"/>
+          <p:cNvPr id="16" name="Shape 14"/>
+          <p:cNvSpPr/>
+          <p:nvPr/>
+        </p:nvSpPr>
+        <p:spPr>
+          <a:xfrm>
+            <a:off x="3090672" y="2706624"/>
+            <a:ext cx="384048" cy="384048"/>
+          </a:xfrm>
+          <a:prstGeom prst="ellipse">
+            <a:avLst/>
+          </a:prstGeom>
+          <a:solidFill>
+            <a:srgbClr val="6D28D9"/>
+          </a:solidFill>
+          <a:ln w="12700">
+            <a:solidFill>
+              <a:srgbClr val="6D28D9">
+                <a:alpha val="0"/>
+              </a:srgbClr>
+            </a:solidFill>
+            <a:prstDash val="solid"/>
+          </a:ln>
+        </p:spPr>
+      </p:sp>
+      <p:sp>
+        <p:nvSpPr>
+          <p:cNvPr id="17" name="Text 15"/>
+          <p:cNvSpPr/>
+          <p:nvPr/>
+        </p:nvSpPr>
+        <p:spPr>
+          <a:xfrm>
+            <a:off x="3090672" y="2825496"/>
+            <a:ext cx="384048" cy="109728"/>
+          </a:xfrm>
+          <a:prstGeom prst="rect">
+            <a:avLst/>
+          </a:prstGeom>
+          <a:noFill/>
+          <a:ln/>
+        </p:spPr>
+        <p:txBody>
+          <a:bodyPr wrap="square" lIns="0" tIns="0" rIns="0" bIns="0" rtlCol="0" anchor="ctr"/>
+          <a:lstStyle/>
+          <a:p>
+            <a:pPr algn="ctr" indent="0" marL="0">
+              <a:buNone/>
+            </a:pPr>
+            <a:r>
+              <a:rPr lang="en-US" sz="1020" b="1" dirty="0">
+                <a:solidFill>
+                  <a:srgbClr val="FFFFFF"/>
+                </a:solidFill>
+                <a:latin typeface="Inter" pitchFamily="34" charset="0"/>
+                <a:ea typeface="Inter" pitchFamily="34" charset="-122"/>
+                <a:cs typeface="Inter" pitchFamily="34" charset="-120"/>
+              </a:rPr>
+              <a:t>2</a:t>
+            </a:r>
+            <a:endParaRPr lang="en-US" sz="1020" dirty="0"/>
+          </a:p>
+        </p:txBody>
+      </p:sp>
+      <p:sp>
+        <p:nvSpPr>
+          <p:cNvPr id="18" name="Text 16"/>
+          <p:cNvSpPr/>
+          <p:nvPr/>
+        </p:nvSpPr>
+        <p:spPr>
+          <a:xfrm>
+            <a:off x="3584448" y="2761488"/>
+            <a:ext cx="987552" cy="201168"/>
+          </a:xfrm>
+          <a:prstGeom prst="rect">
+            <a:avLst/>
+          </a:prstGeom>
+          <a:noFill/>
+          <a:ln/>
+        </p:spPr>
+        <p:txBody>
+          <a:bodyPr wrap="square" lIns="0" tIns="0" rIns="0" bIns="0" rtlCol="0" anchor="ctr">
+            <a:normAutofit/>
+          </a:bodyPr>
+          <a:lstStyle/>
+          <a:p>
+            <a:pPr indent="0" marL="0">
+              <a:buNone/>
+            </a:pPr>
+            <a:r>
+              <a:rPr lang="en-US" sz="1880" b="1" dirty="0">
+                <a:solidFill>
+                  <a:srgbClr val="4C1D95"/>
+                </a:solidFill>
+                <a:latin typeface="Lora" pitchFamily="34" charset="0"/>
+                <a:ea typeface="Lora" pitchFamily="34" charset="-122"/>
+                <a:cs typeface="Lora" pitchFamily="34" charset="-120"/>
+              </a:rPr>
+              <a:t>Choose</a:t>
+            </a:r>
+            <a:endParaRPr lang="en-US" sz="1880" dirty="0"/>
+          </a:p>
+        </p:txBody>
+      </p:sp>
+      <p:sp>
+        <p:nvSpPr>
+          <p:cNvPr id="19" name="Text 17"/>
+          <p:cNvSpPr/>
+          <p:nvPr/>
+        </p:nvSpPr>
+        <p:spPr>
+          <a:xfrm>
+            <a:off x="3127248" y="3401568"/>
+            <a:ext cx="1444752" cy="402336"/>
+          </a:xfrm>
+          <a:prstGeom prst="rect">
+            <a:avLst/>
+          </a:prstGeom>
+          <a:noFill/>
+          <a:ln/>
+        </p:spPr>
+        <p:txBody>
+          <a:bodyPr wrap="square" lIns="0" tIns="0" rIns="0" bIns="0" rtlCol="0" anchor="ctr">
+            <a:normAutofit/>
+          </a:bodyPr>
+          <a:lstStyle/>
+          <a:p>
+            <a:pPr indent="0" marL="0">
+              <a:buNone/>
+            </a:pPr>
+            <a:r>
+              <a:rPr lang="en-US" sz="1240" dirty="0">
+                <a:solidFill>
+                  <a:srgbClr val="1F2937"/>
+                </a:solidFill>
+                <a:latin typeface="Inter" pitchFamily="34" charset="0"/>
+                <a:ea typeface="Inter" pitchFamily="34" charset="-122"/>
+                <a:cs typeface="Inter" pitchFamily="34" charset="-120"/>
+              </a:rPr>
+              <a:t>Five work days to elect the path.</a:t>
+            </a:r>
+            <a:endParaRPr lang="en-US" sz="1240" dirty="0"/>
+          </a:p>
+        </p:txBody>
+      </p:sp>
+      <p:sp>
+        <p:nvSpPr>
+          <p:cNvPr id="20" name="Text 18"/>
+          <p:cNvSpPr/>
+          <p:nvPr/>
+        </p:nvSpPr>
+        <p:spPr>
+          <a:xfrm>
+            <a:off x="3127248" y="4142232"/>
+            <a:ext cx="1444752" cy="128016"/>
+          </a:xfrm>
+          <a:prstGeom prst="rect">
+            <a:avLst/>
+          </a:prstGeom>
+          <a:noFill/>
+          <a:ln/>
+        </p:spPr>
+        <p:txBody>
+          <a:bodyPr wrap="square" lIns="0" tIns="0" rIns="0" bIns="0" rtlCol="0" anchor="ctr">
+            <a:normAutofit/>
+          </a:bodyPr>
+          <a:lstStyle/>
+          <a:p>
+            <a:pPr indent="0" marL="0">
+              <a:buNone/>
+            </a:pPr>
+            <a:r>
+              <a:rPr lang="en-US" sz="780" b="1" dirty="0">
+                <a:solidFill>
+                  <a:srgbClr val="6D28D9"/>
+                </a:solidFill>
+                <a:latin typeface="Inter" pitchFamily="34" charset="0"/>
+                <a:ea typeface="Inter" pitchFamily="34" charset="-122"/>
+                <a:cs typeface="Inter" pitchFamily="34" charset="-120"/>
+              </a:rPr>
+              <a:t>Art. 44 Sec. 3(A)</a:t>
+            </a:r>
+            <a:endParaRPr lang="en-US" sz="780" dirty="0"/>
+          </a:p>
+        </p:txBody>
+      </p:sp>
+      <p:sp>
+        <p:nvSpPr>
+          <p:cNvPr id="21" name="Text 19"/>
+          <p:cNvSpPr/>
+          <p:nvPr/>
+        </p:nvSpPr>
+        <p:spPr>
+          <a:xfrm>
+            <a:off x="4846320" y="3246120"/>
+            <a:ext cx="228600" cy="256032"/>
+          </a:xfrm>
+          <a:prstGeom prst="rect">
+            <a:avLst/>
+          </a:prstGeom>
+          <a:noFill/>
+          <a:ln/>
+        </p:spPr>
+        <p:txBody>
+          <a:bodyPr wrap="square" lIns="0" tIns="0" rIns="0" bIns="0" rtlCol="0" anchor="ctr"/>
+          <a:lstStyle/>
+          <a:p>
+            <a:pPr algn="ctr" indent="0" marL="0">
+              <a:buNone/>
+            </a:pPr>
+            <a:r>
+              <a:rPr lang="en-US" sz="2200" b="1" dirty="0">
+                <a:solidFill>
+                  <a:srgbClr val="6D28D9"/>
+                </a:solidFill>
+                <a:latin typeface="Inter" pitchFamily="34" charset="0"/>
+                <a:ea typeface="Inter" pitchFamily="34" charset="-122"/>
+                <a:cs typeface="Inter" pitchFamily="34" charset="-120"/>
+              </a:rPr>
+              <a:t>&gt;</a:t>
+            </a:r>
+            <a:endParaRPr lang="en-US" sz="2200" dirty="0"/>
+          </a:p>
+        </p:txBody>
+      </p:sp>
+      <p:sp>
+        <p:nvSpPr>
+          <p:cNvPr id="22" name="Shape 20"/>
+          <p:cNvSpPr/>
+          <p:nvPr/>
+        </p:nvSpPr>
+        <p:spPr>
+          <a:xfrm>
+            <a:off x="5166360" y="2487168"/>
+            <a:ext cx="1865376" cy="2084832"/>
           </a:xfrm>
           <a:prstGeom prst="roundRect">
             <a:avLst>
-              <a:gd name="adj" fmla="val 5882"/>
+              <a:gd name="adj" fmla="val 3922"/>
             </a:avLst>
           </a:prstGeom>
           <a:solidFill>
-            <a:srgbClr val="F9FAFB"/>
+            <a:srgbClr val="FFFFFF"/>
           </a:solidFill>
           <a:ln w="12700">
             <a:solidFill>
@@ -7255,14 +8248,41 @@
       </p:sp>
       <p:sp>
         <p:nvSpPr>
-          <p:cNvPr id="10" name="Text 8"/>
-          <p:cNvSpPr/>
-          <p:nvPr/>
-        </p:nvSpPr>
-        <p:spPr>
-          <a:xfrm>
-            <a:off x="1444752" y="3218688"/>
-            <a:ext cx="1920240" cy="201168"/>
+          <p:cNvPr id="23" name="Shape 21"/>
+          <p:cNvSpPr/>
+          <p:nvPr/>
+        </p:nvSpPr>
+        <p:spPr>
+          <a:xfrm>
+            <a:off x="5330952" y="2706624"/>
+            <a:ext cx="384048" cy="384048"/>
+          </a:xfrm>
+          <a:prstGeom prst="ellipse">
+            <a:avLst/>
+          </a:prstGeom>
+          <a:solidFill>
+            <a:srgbClr val="6D28D9"/>
+          </a:solidFill>
+          <a:ln w="12700">
+            <a:solidFill>
+              <a:srgbClr val="6D28D9">
+                <a:alpha val="0"/>
+              </a:srgbClr>
+            </a:solidFill>
+            <a:prstDash val="solid"/>
+          </a:ln>
+        </p:spPr>
+      </p:sp>
+      <p:sp>
+        <p:nvSpPr>
+          <p:cNvPr id="24" name="Text 22"/>
+          <p:cNvSpPr/>
+          <p:nvPr/>
+        </p:nvSpPr>
+        <p:spPr>
+          <a:xfrm>
+            <a:off x="5330952" y="2825496"/>
+            <a:ext cx="384048" cy="109728"/>
           </a:xfrm>
           <a:prstGeom prst="rect">
             <a:avLst/>
@@ -7278,7 +8298,48 @@
               <a:buNone/>
             </a:pPr>
             <a:r>
-              <a:rPr lang="en-US" sz="2200" b="1" dirty="0">
+              <a:rPr lang="en-US" sz="1020" b="1" dirty="0">
+                <a:solidFill>
+                  <a:srgbClr val="FFFFFF"/>
+                </a:solidFill>
+                <a:latin typeface="Inter" pitchFamily="34" charset="0"/>
+                <a:ea typeface="Inter" pitchFamily="34" charset="-122"/>
+                <a:cs typeface="Inter" pitchFamily="34" charset="-120"/>
+              </a:rPr>
+              <a:t>3</a:t>
+            </a:r>
+            <a:endParaRPr lang="en-US" sz="1020" dirty="0"/>
+          </a:p>
+        </p:txBody>
+      </p:sp>
+      <p:sp>
+        <p:nvSpPr>
+          <p:cNvPr id="25" name="Text 23"/>
+          <p:cNvSpPr/>
+          <p:nvPr/>
+        </p:nvSpPr>
+        <p:spPr>
+          <a:xfrm>
+            <a:off x="5824728" y="2761488"/>
+            <a:ext cx="987552" cy="201168"/>
+          </a:xfrm>
+          <a:prstGeom prst="rect">
+            <a:avLst/>
+          </a:prstGeom>
+          <a:noFill/>
+          <a:ln/>
+        </p:spPr>
+        <p:txBody>
+          <a:bodyPr wrap="square" lIns="0" tIns="0" rIns="0" bIns="0" rtlCol="0" anchor="ctr">
+            <a:normAutofit/>
+          </a:bodyPr>
+          <a:lstStyle/>
+          <a:p>
+            <a:pPr indent="0" marL="0">
+              <a:buNone/>
+            </a:pPr>
+            <a:r>
+              <a:rPr lang="en-US" sz="1880" b="1" dirty="0">
                 <a:solidFill>
                   <a:srgbClr val="4C1D95"/>
                 </a:solidFill>
@@ -7286,22 +8347,22 @@
                 <a:ea typeface="Lora" pitchFamily="34" charset="-122"/>
                 <a:cs typeface="Lora" pitchFamily="34" charset="-120"/>
               </a:rPr>
-              <a:t>Meet</a:t>
-            </a:r>
-            <a:endParaRPr lang="en-US" sz="2200" dirty="0"/>
-          </a:p>
-        </p:txBody>
-      </p:sp>
-      <p:sp>
-        <p:nvSpPr>
-          <p:cNvPr id="11" name="Text 9"/>
-          <p:cNvSpPr/>
-          <p:nvPr/>
-        </p:nvSpPr>
-        <p:spPr>
-          <a:xfrm>
-            <a:off x="1444752" y="3566160"/>
-            <a:ext cx="1920240" cy="365760"/>
+              <a:t>Vacancies</a:t>
+            </a:r>
+            <a:endParaRPr lang="en-US" sz="1880" dirty="0"/>
+          </a:p>
+        </p:txBody>
+      </p:sp>
+      <p:sp>
+        <p:nvSpPr>
+          <p:cNvPr id="26" name="Text 24"/>
+          <p:cNvSpPr/>
+          <p:nvPr/>
+        </p:nvSpPr>
+        <p:spPr>
+          <a:xfrm>
+            <a:off x="5367528" y="3401568"/>
+            <a:ext cx="1444752" cy="402336"/>
           </a:xfrm>
           <a:prstGeom prst="rect">
             <a:avLst/>
@@ -7315,42 +8376,122 @@
           </a:bodyPr>
           <a:lstStyle/>
           <a:p>
+            <a:pPr indent="0" marL="0">
+              <a:buNone/>
+            </a:pPr>
+            <a:r>
+              <a:rPr lang="en-US" sz="1240" dirty="0">
+                <a:solidFill>
+                  <a:srgbClr val="1F2937"/>
+                </a:solidFill>
+                <a:latin typeface="Inter" pitchFamily="34" charset="0"/>
+                <a:ea typeface="Inter" pitchFamily="34" charset="-122"/>
+                <a:cs typeface="Inter" pitchFamily="34" charset="-120"/>
+              </a:rPr>
+              <a:t>Same class, same range, then lower range.</a:t>
+            </a:r>
+            <a:endParaRPr lang="en-US" sz="1240" dirty="0"/>
+          </a:p>
+        </p:txBody>
+      </p:sp>
+      <p:sp>
+        <p:nvSpPr>
+          <p:cNvPr id="27" name="Text 25"/>
+          <p:cNvSpPr/>
+          <p:nvPr/>
+        </p:nvSpPr>
+        <p:spPr>
+          <a:xfrm>
+            <a:off x="5367528" y="4142232"/>
+            <a:ext cx="1444752" cy="128016"/>
+          </a:xfrm>
+          <a:prstGeom prst="rect">
+            <a:avLst/>
+          </a:prstGeom>
+          <a:noFill/>
+          <a:ln/>
+        </p:spPr>
+        <p:txBody>
+          <a:bodyPr wrap="square" lIns="0" tIns="0" rIns="0" bIns="0" rtlCol="0" anchor="ctr">
+            <a:normAutofit/>
+          </a:bodyPr>
+          <a:lstStyle/>
+          <a:p>
+            <a:pPr indent="0" marL="0">
+              <a:buNone/>
+            </a:pPr>
+            <a:r>
+              <a:rPr lang="en-US" sz="780" b="1" dirty="0">
+                <a:solidFill>
+                  <a:srgbClr val="6D28D9"/>
+                </a:solidFill>
+                <a:latin typeface="Inter" pitchFamily="34" charset="0"/>
+                <a:ea typeface="Inter" pitchFamily="34" charset="-122"/>
+                <a:cs typeface="Inter" pitchFamily="34" charset="-120"/>
+              </a:rPr>
+              <a:t>Art. 44 Sec. 3(E)(1)</a:t>
+            </a:r>
+            <a:endParaRPr lang="en-US" sz="780" dirty="0"/>
+          </a:p>
+        </p:txBody>
+      </p:sp>
+      <p:sp>
+        <p:nvSpPr>
+          <p:cNvPr id="28" name="Text 26"/>
+          <p:cNvSpPr/>
+          <p:nvPr/>
+        </p:nvSpPr>
+        <p:spPr>
+          <a:xfrm>
+            <a:off x="7086600" y="3246120"/>
+            <a:ext cx="228600" cy="256032"/>
+          </a:xfrm>
+          <a:prstGeom prst="rect">
+            <a:avLst/>
+          </a:prstGeom>
+          <a:noFill/>
+          <a:ln/>
+        </p:spPr>
+        <p:txBody>
+          <a:bodyPr wrap="square" lIns="0" tIns="0" rIns="0" bIns="0" rtlCol="0" anchor="ctr"/>
+          <a:lstStyle/>
+          <a:p>
             <a:pPr algn="ctr" indent="0" marL="0">
               <a:buNone/>
             </a:pPr>
             <a:r>
-              <a:rPr lang="en-US" sz="1320" dirty="0">
-                <a:solidFill>
-                  <a:srgbClr val="374151"/>
-                </a:solidFill>
-                <a:latin typeface="Inter" pitchFamily="34" charset="0"/>
-                <a:ea typeface="Inter" pitchFamily="34" charset="-122"/>
-                <a:cs typeface="Inter" pitchFamily="34" charset="-120"/>
-              </a:rPr>
-              <a:t>Members can talk through questions and next steps.</a:t>
-            </a:r>
-            <a:endParaRPr lang="en-US" sz="1320" dirty="0"/>
-          </a:p>
-        </p:txBody>
-      </p:sp>
-      <p:sp>
-        <p:nvSpPr>
-          <p:cNvPr id="12" name="Shape 10"/>
-          <p:cNvSpPr/>
-          <p:nvPr/>
-        </p:nvSpPr>
-        <p:spPr>
-          <a:xfrm>
-            <a:off x="4297680" y="2999232"/>
-            <a:ext cx="2423160" cy="1243584"/>
+              <a:rPr lang="en-US" sz="2200" b="1" dirty="0">
+                <a:solidFill>
+                  <a:srgbClr val="6D28D9"/>
+                </a:solidFill>
+                <a:latin typeface="Inter" pitchFamily="34" charset="0"/>
+                <a:ea typeface="Inter" pitchFamily="34" charset="-122"/>
+                <a:cs typeface="Inter" pitchFamily="34" charset="-120"/>
+              </a:rPr>
+              <a:t>&gt;</a:t>
+            </a:r>
+            <a:endParaRPr lang="en-US" sz="2200" dirty="0"/>
+          </a:p>
+        </p:txBody>
+      </p:sp>
+      <p:sp>
+        <p:nvSpPr>
+          <p:cNvPr id="29" name="Shape 27"/>
+          <p:cNvSpPr/>
+          <p:nvPr/>
+        </p:nvSpPr>
+        <p:spPr>
+          <a:xfrm>
+            <a:off x="7406640" y="2487168"/>
+            <a:ext cx="1865376" cy="2084832"/>
           </a:xfrm>
           <a:prstGeom prst="roundRect">
             <a:avLst>
-              <a:gd name="adj" fmla="val 5882"/>
+              <a:gd name="adj" fmla="val 3922"/>
             </a:avLst>
           </a:prstGeom>
           <a:solidFill>
-            <a:srgbClr val="F5F3FF"/>
+            <a:srgbClr val="FFFFFF"/>
           </a:solidFill>
           <a:ln w="12700">
             <a:solidFill>
@@ -7362,14 +8503,41 @@
       </p:sp>
       <p:sp>
         <p:nvSpPr>
-          <p:cNvPr id="13" name="Text 11"/>
-          <p:cNvSpPr/>
-          <p:nvPr/>
-        </p:nvSpPr>
-        <p:spPr>
-          <a:xfrm>
-            <a:off x="4507992" y="3218688"/>
-            <a:ext cx="1920240" cy="201168"/>
+          <p:cNvPr id="30" name="Shape 28"/>
+          <p:cNvSpPr/>
+          <p:nvPr/>
+        </p:nvSpPr>
+        <p:spPr>
+          <a:xfrm>
+            <a:off x="7571232" y="2706624"/>
+            <a:ext cx="384048" cy="384048"/>
+          </a:xfrm>
+          <a:prstGeom prst="ellipse">
+            <a:avLst/>
+          </a:prstGeom>
+          <a:solidFill>
+            <a:srgbClr val="6D28D9"/>
+          </a:solidFill>
+          <a:ln w="12700">
+            <a:solidFill>
+              <a:srgbClr val="6D28D9">
+                <a:alpha val="0"/>
+              </a:srgbClr>
+            </a:solidFill>
+            <a:prstDash val="solid"/>
+          </a:ln>
+        </p:spPr>
+      </p:sp>
+      <p:sp>
+        <p:nvSpPr>
+          <p:cNvPr id="31" name="Text 29"/>
+          <p:cNvSpPr/>
+          <p:nvPr/>
+        </p:nvSpPr>
+        <p:spPr>
+          <a:xfrm>
+            <a:off x="7571232" y="2825496"/>
+            <a:ext cx="384048" cy="109728"/>
           </a:xfrm>
           <a:prstGeom prst="rect">
             <a:avLst/>
@@ -7385,7 +8553,48 @@
               <a:buNone/>
             </a:pPr>
             <a:r>
-              <a:rPr lang="en-US" sz="2200" b="1" dirty="0">
+              <a:rPr lang="en-US" sz="1020" b="1" dirty="0">
+                <a:solidFill>
+                  <a:srgbClr val="FFFFFF"/>
+                </a:solidFill>
+                <a:latin typeface="Inter" pitchFamily="34" charset="0"/>
+                <a:ea typeface="Inter" pitchFamily="34" charset="-122"/>
+                <a:cs typeface="Inter" pitchFamily="34" charset="-120"/>
+              </a:rPr>
+              <a:t>4</a:t>
+            </a:r>
+            <a:endParaRPr lang="en-US" sz="1020" dirty="0"/>
+          </a:p>
+        </p:txBody>
+      </p:sp>
+      <p:sp>
+        <p:nvSpPr>
+          <p:cNvPr id="32" name="Text 30"/>
+          <p:cNvSpPr/>
+          <p:nvPr/>
+        </p:nvSpPr>
+        <p:spPr>
+          <a:xfrm>
+            <a:off x="8065008" y="2761488"/>
+            <a:ext cx="987552" cy="201168"/>
+          </a:xfrm>
+          <a:prstGeom prst="rect">
+            <a:avLst/>
+          </a:prstGeom>
+          <a:noFill/>
+          <a:ln/>
+        </p:spPr>
+        <p:txBody>
+          <a:bodyPr wrap="square" lIns="0" tIns="0" rIns="0" bIns="0" rtlCol="0" anchor="ctr">
+            <a:normAutofit/>
+          </a:bodyPr>
+          <a:lstStyle/>
+          <a:p>
+            <a:pPr indent="0" marL="0">
+              <a:buNone/>
+            </a:pPr>
+            <a:r>
+              <a:rPr lang="en-US" sz="1880" b="1" dirty="0">
                 <a:solidFill>
                   <a:srgbClr val="4C1D95"/>
                 </a:solidFill>
@@ -7393,22 +8602,22 @@
                 <a:ea typeface="Lora" pitchFamily="34" charset="-122"/>
                 <a:cs typeface="Lora" pitchFamily="34" charset="-120"/>
               </a:rPr>
-              <a:t>Plan</a:t>
-            </a:r>
-            <a:endParaRPr lang="en-US" sz="2200" dirty="0"/>
-          </a:p>
-        </p:txBody>
-      </p:sp>
-      <p:sp>
-        <p:nvSpPr>
-          <p:cNvPr id="14" name="Text 12"/>
-          <p:cNvSpPr/>
-          <p:nvPr/>
-        </p:nvSpPr>
-        <p:spPr>
-          <a:xfrm>
-            <a:off x="4507992" y="3566160"/>
-            <a:ext cx="1920240" cy="365760"/>
+              <a:t>Bumping</a:t>
+            </a:r>
+            <a:endParaRPr lang="en-US" sz="1880" dirty="0"/>
+          </a:p>
+        </p:txBody>
+      </p:sp>
+      <p:sp>
+        <p:nvSpPr>
+          <p:cNvPr id="33" name="Text 31"/>
+          <p:cNvSpPr/>
+          <p:nvPr/>
+        </p:nvSpPr>
+        <p:spPr>
+          <a:xfrm>
+            <a:off x="7607808" y="3401568"/>
+            <a:ext cx="1444752" cy="402336"/>
           </a:xfrm>
           <a:prstGeom prst="rect">
             <a:avLst/>
@@ -7422,46 +8631,126 @@
           </a:bodyPr>
           <a:lstStyle/>
           <a:p>
+            <a:pPr indent="0" marL="0">
+              <a:buNone/>
+            </a:pPr>
+            <a:r>
+              <a:rPr lang="en-US" sz="1240" dirty="0">
+                <a:solidFill>
+                  <a:srgbClr val="1F2937"/>
+                </a:solidFill>
+                <a:latin typeface="Inter" pitchFamily="34" charset="0"/>
+                <a:ea typeface="Inter" pitchFamily="34" charset="-122"/>
+                <a:cs typeface="Inter" pitchFamily="34" charset="-120"/>
+              </a:rPr>
+              <a:t>Lower seniority only; must be qualified.</a:t>
+            </a:r>
+            <a:endParaRPr lang="en-US" sz="1240" dirty="0"/>
+          </a:p>
+        </p:txBody>
+      </p:sp>
+      <p:sp>
+        <p:nvSpPr>
+          <p:cNvPr id="34" name="Text 32"/>
+          <p:cNvSpPr/>
+          <p:nvPr/>
+        </p:nvSpPr>
+        <p:spPr>
+          <a:xfrm>
+            <a:off x="7607808" y="4142232"/>
+            <a:ext cx="1444752" cy="128016"/>
+          </a:xfrm>
+          <a:prstGeom prst="rect">
+            <a:avLst/>
+          </a:prstGeom>
+          <a:noFill/>
+          <a:ln/>
+        </p:spPr>
+        <p:txBody>
+          <a:bodyPr wrap="square" lIns="0" tIns="0" rIns="0" bIns="0" rtlCol="0" anchor="ctr">
+            <a:normAutofit/>
+          </a:bodyPr>
+          <a:lstStyle/>
+          <a:p>
+            <a:pPr indent="0" marL="0">
+              <a:buNone/>
+            </a:pPr>
+            <a:r>
+              <a:rPr lang="en-US" sz="780" b="1" dirty="0">
+                <a:solidFill>
+                  <a:srgbClr val="6D28D9"/>
+                </a:solidFill>
+                <a:latin typeface="Inter" pitchFamily="34" charset="0"/>
+                <a:ea typeface="Inter" pitchFamily="34" charset="-122"/>
+                <a:cs typeface="Inter" pitchFamily="34" charset="-120"/>
+              </a:rPr>
+              <a:t>Art. 44 Secs. 3(E)(2), 3(F)</a:t>
+            </a:r>
+            <a:endParaRPr lang="en-US" sz="780" dirty="0"/>
+          </a:p>
+        </p:txBody>
+      </p:sp>
+      <p:sp>
+        <p:nvSpPr>
+          <p:cNvPr id="35" name="Text 33"/>
+          <p:cNvSpPr/>
+          <p:nvPr/>
+        </p:nvSpPr>
+        <p:spPr>
+          <a:xfrm>
+            <a:off x="9326880" y="3246120"/>
+            <a:ext cx="228600" cy="256032"/>
+          </a:xfrm>
+          <a:prstGeom prst="rect">
+            <a:avLst/>
+          </a:prstGeom>
+          <a:noFill/>
+          <a:ln/>
+        </p:spPr>
+        <p:txBody>
+          <a:bodyPr wrap="square" lIns="0" tIns="0" rIns="0" bIns="0" rtlCol="0" anchor="ctr"/>
+          <a:lstStyle/>
+          <a:p>
             <a:pPr algn="ctr" indent="0" marL="0">
               <a:buNone/>
             </a:pPr>
             <a:r>
-              <a:rPr lang="en-US" sz="1320" dirty="0">
-                <a:solidFill>
-                  <a:srgbClr val="374151"/>
-                </a:solidFill>
-                <a:latin typeface="Inter" pitchFamily="34" charset="0"/>
-                <a:ea typeface="Inter" pitchFamily="34" charset="-122"/>
-                <a:cs typeface="Inter" pitchFamily="34" charset="-120"/>
-              </a:rPr>
-              <a:t>We can prep outreach, materials, and rally turnout.</a:t>
-            </a:r>
-            <a:endParaRPr lang="en-US" sz="1320" dirty="0"/>
-          </a:p>
-        </p:txBody>
-      </p:sp>
-      <p:sp>
-        <p:nvSpPr>
-          <p:cNvPr id="15" name="Shape 13"/>
-          <p:cNvSpPr/>
-          <p:nvPr/>
-        </p:nvSpPr>
-        <p:spPr>
-          <a:xfrm>
-            <a:off x="7360920" y="2999232"/>
-            <a:ext cx="2423160" cy="1243584"/>
+              <a:rPr lang="en-US" sz="2200" b="1" dirty="0">
+                <a:solidFill>
+                  <a:srgbClr val="6D28D9"/>
+                </a:solidFill>
+                <a:latin typeface="Inter" pitchFamily="34" charset="0"/>
+                <a:ea typeface="Inter" pitchFamily="34" charset="-122"/>
+                <a:cs typeface="Inter" pitchFamily="34" charset="-120"/>
+              </a:rPr>
+              <a:t>&gt;</a:t>
+            </a:r>
+            <a:endParaRPr lang="en-US" sz="2200" dirty="0"/>
+          </a:p>
+        </p:txBody>
+      </p:sp>
+      <p:sp>
+        <p:nvSpPr>
+          <p:cNvPr id="36" name="Shape 34"/>
+          <p:cNvSpPr/>
+          <p:nvPr/>
+        </p:nvSpPr>
+        <p:spPr>
+          <a:xfrm>
+            <a:off x="9646920" y="2487168"/>
+            <a:ext cx="1865376" cy="2084832"/>
           </a:xfrm>
           <a:prstGeom prst="roundRect">
             <a:avLst>
-              <a:gd name="adj" fmla="val 5882"/>
+              <a:gd name="adj" fmla="val 3922"/>
             </a:avLst>
           </a:prstGeom>
           <a:solidFill>
-            <a:srgbClr val="F9FAFB"/>
+            <a:srgbClr val="F5F3FF"/>
           </a:solidFill>
           <a:ln w="12700">
             <a:solidFill>
-              <a:srgbClr val="E5E7EB"/>
+              <a:srgbClr val="EDE9FE"/>
             </a:solidFill>
             <a:prstDash val="solid"/>
           </a:ln>
@@ -7469,14 +8758,41 @@
       </p:sp>
       <p:sp>
         <p:nvSpPr>
-          <p:cNvPr id="16" name="Text 14"/>
-          <p:cNvSpPr/>
-          <p:nvPr/>
-        </p:nvSpPr>
-        <p:spPr>
-          <a:xfrm>
-            <a:off x="7571232" y="3218688"/>
-            <a:ext cx="1920240" cy="201168"/>
+          <p:cNvPr id="37" name="Shape 35"/>
+          <p:cNvSpPr/>
+          <p:nvPr/>
+        </p:nvSpPr>
+        <p:spPr>
+          <a:xfrm>
+            <a:off x="9811512" y="2706624"/>
+            <a:ext cx="384048" cy="384048"/>
+          </a:xfrm>
+          <a:prstGeom prst="ellipse">
+            <a:avLst/>
+          </a:prstGeom>
+          <a:solidFill>
+            <a:srgbClr val="6D28D9"/>
+          </a:solidFill>
+          <a:ln w="12700">
+            <a:solidFill>
+              <a:srgbClr val="6D28D9">
+                <a:alpha val="0"/>
+              </a:srgbClr>
+            </a:solidFill>
+            <a:prstDash val="solid"/>
+          </a:ln>
+        </p:spPr>
+      </p:sp>
+      <p:sp>
+        <p:nvSpPr>
+          <p:cNvPr id="38" name="Text 36"/>
+          <p:cNvSpPr/>
+          <p:nvPr/>
+        </p:nvSpPr>
+        <p:spPr>
+          <a:xfrm>
+            <a:off x="9811512" y="2825496"/>
+            <a:ext cx="384048" cy="109728"/>
           </a:xfrm>
           <a:prstGeom prst="rect">
             <a:avLst/>
@@ -7492,7 +8808,48 @@
               <a:buNone/>
             </a:pPr>
             <a:r>
-              <a:rPr lang="en-US" sz="2200" b="1" dirty="0">
+              <a:rPr lang="en-US" sz="1020" b="1" dirty="0">
+                <a:solidFill>
+                  <a:srgbClr val="FFFFFF"/>
+                </a:solidFill>
+                <a:latin typeface="Inter" pitchFamily="34" charset="0"/>
+                <a:ea typeface="Inter" pitchFamily="34" charset="-122"/>
+                <a:cs typeface="Inter" pitchFamily="34" charset="-120"/>
+              </a:rPr>
+              <a:t>5</a:t>
+            </a:r>
+            <a:endParaRPr lang="en-US" sz="1020" dirty="0"/>
+          </a:p>
+        </p:txBody>
+      </p:sp>
+      <p:sp>
+        <p:nvSpPr>
+          <p:cNvPr id="39" name="Text 37"/>
+          <p:cNvSpPr/>
+          <p:nvPr/>
+        </p:nvSpPr>
+        <p:spPr>
+          <a:xfrm>
+            <a:off x="10305288" y="2761488"/>
+            <a:ext cx="987552" cy="201168"/>
+          </a:xfrm>
+          <a:prstGeom prst="rect">
+            <a:avLst/>
+          </a:prstGeom>
+          <a:noFill/>
+          <a:ln/>
+        </p:spPr>
+        <p:txBody>
+          <a:bodyPr wrap="square" lIns="0" tIns="0" rIns="0" bIns="0" rtlCol="0" anchor="ctr">
+            <a:normAutofit/>
+          </a:bodyPr>
+          <a:lstStyle/>
+          <a:p>
+            <a:pPr indent="0" marL="0">
+              <a:buNone/>
+            </a:pPr>
+            <a:r>
+              <a:rPr lang="en-US" sz="1880" b="1" dirty="0">
                 <a:solidFill>
                   <a:srgbClr val="4C1D95"/>
                 </a:solidFill>
@@ -7500,22 +8857,22 @@
                 <a:ea typeface="Lora" pitchFamily="34" charset="-122"/>
                 <a:cs typeface="Lora" pitchFamily="34" charset="-120"/>
               </a:rPr>
-              <a:t>Follow up</a:t>
-            </a:r>
-            <a:endParaRPr lang="en-US" sz="2200" dirty="0"/>
-          </a:p>
-        </p:txBody>
-      </p:sp>
-      <p:sp>
-        <p:nvSpPr>
-          <p:cNvPr id="17" name="Text 15"/>
-          <p:cNvSpPr/>
-          <p:nvPr/>
-        </p:nvSpPr>
-        <p:spPr>
-          <a:xfrm>
-            <a:off x="7571232" y="3566160"/>
-            <a:ext cx="1920240" cy="365760"/>
+              <a:t>Recall</a:t>
+            </a:r>
+            <a:endParaRPr lang="en-US" sz="1880" dirty="0"/>
+          </a:p>
+        </p:txBody>
+      </p:sp>
+      <p:sp>
+        <p:nvSpPr>
+          <p:cNvPr id="40" name="Text 38"/>
+          <p:cNvSpPr/>
+          <p:nvPr/>
+        </p:nvSpPr>
+        <p:spPr>
+          <a:xfrm>
+            <a:off x="9848088" y="3401568"/>
+            <a:ext cx="1444752" cy="402336"/>
           </a:xfrm>
           <a:prstGeom prst="rect">
             <a:avLst/>
@@ -7529,46 +8886,87 @@
           </a:bodyPr>
           <a:lstStyle/>
           <a:p>
-            <a:pPr algn="ctr" indent="0" marL="0">
-              <a:buNone/>
-            </a:pPr>
-            <a:r>
-              <a:rPr lang="en-US" sz="1320" dirty="0">
-                <a:solidFill>
-                  <a:srgbClr val="374151"/>
-                </a:solidFill>
-                <a:latin typeface="Inter" pitchFamily="34" charset="0"/>
-                <a:ea typeface="Inter" pitchFamily="34" charset="-122"/>
-                <a:cs typeface="Inter" pitchFamily="34" charset="-120"/>
-              </a:rPr>
-              <a:t>We can connect members with stewards and leaders.</a:t>
-            </a:r>
-            <a:endParaRPr lang="en-US" sz="1320" dirty="0"/>
-          </a:p>
-        </p:txBody>
-      </p:sp>
-      <p:sp>
-        <p:nvSpPr>
-          <p:cNvPr id="18" name="Shape 16"/>
-          <p:cNvSpPr/>
-          <p:nvPr/>
-        </p:nvSpPr>
-        <p:spPr>
-          <a:xfrm>
-            <a:off x="3072384" y="4736592"/>
-            <a:ext cx="5440680" cy="457200"/>
+            <a:pPr indent="0" marL="0">
+              <a:buNone/>
+            </a:pPr>
+            <a:r>
+              <a:rPr lang="en-US" sz="1240" dirty="0">
+                <a:solidFill>
+                  <a:srgbClr val="1F2937"/>
+                </a:solidFill>
+                <a:latin typeface="Inter" pitchFamily="34" charset="0"/>
+                <a:ea typeface="Inter" pitchFamily="34" charset="-122"/>
+                <a:cs typeface="Inter" pitchFamily="34" charset="-120"/>
+              </a:rPr>
+              <a:t>Seniority order; one refusal allowed.</a:t>
+            </a:r>
+            <a:endParaRPr lang="en-US" sz="1240" dirty="0"/>
+          </a:p>
+        </p:txBody>
+      </p:sp>
+      <p:sp>
+        <p:nvSpPr>
+          <p:cNvPr id="41" name="Text 39"/>
+          <p:cNvSpPr/>
+          <p:nvPr/>
+        </p:nvSpPr>
+        <p:spPr>
+          <a:xfrm>
+            <a:off x="9848088" y="4142232"/>
+            <a:ext cx="1444752" cy="128016"/>
+          </a:xfrm>
+          <a:prstGeom prst="rect">
+            <a:avLst/>
+          </a:prstGeom>
+          <a:noFill/>
+          <a:ln/>
+        </p:spPr>
+        <p:txBody>
+          <a:bodyPr wrap="square" lIns="0" tIns="0" rIns="0" bIns="0" rtlCol="0" anchor="ctr">
+            <a:normAutofit/>
+          </a:bodyPr>
+          <a:lstStyle/>
+          <a:p>
+            <a:pPr indent="0" marL="0">
+              <a:buNone/>
+            </a:pPr>
+            <a:r>
+              <a:rPr lang="en-US" sz="780" b="1" dirty="0">
+                <a:solidFill>
+                  <a:srgbClr val="6D28D9"/>
+                </a:solidFill>
+                <a:latin typeface="Inter" pitchFamily="34" charset="0"/>
+                <a:ea typeface="Inter" pitchFamily="34" charset="-122"/>
+                <a:cs typeface="Inter" pitchFamily="34" charset="-120"/>
+              </a:rPr>
+              <a:t>Art. 44 Sec. 10</a:t>
+            </a:r>
+            <a:endParaRPr lang="en-US" sz="780" dirty="0"/>
+          </a:p>
+        </p:txBody>
+      </p:sp>
+      <p:sp>
+        <p:nvSpPr>
+          <p:cNvPr id="42" name="Shape 40"/>
+          <p:cNvSpPr/>
+          <p:nvPr/>
+        </p:nvSpPr>
+        <p:spPr>
+          <a:xfrm>
+            <a:off x="822960" y="5074920"/>
+            <a:ext cx="4718304" cy="658368"/>
           </a:xfrm>
           <a:prstGeom prst="roundRect">
             <a:avLst>
-              <a:gd name="adj" fmla="val 16000"/>
+              <a:gd name="adj" fmla="val 11111"/>
             </a:avLst>
           </a:prstGeom>
           <a:solidFill>
-            <a:srgbClr val="4C1D95"/>
+            <a:srgbClr val="FEF3C7"/>
           </a:solidFill>
           <a:ln w="12700">
             <a:solidFill>
-              <a:srgbClr val="4C1D95"/>
+              <a:srgbClr val="FCD34D"/>
             </a:solidFill>
             <a:prstDash val="solid"/>
           </a:ln>
@@ -7576,14 +8974,14 @@
       </p:sp>
       <p:sp>
         <p:nvSpPr>
-          <p:cNvPr id="19" name="Text 17"/>
-          <p:cNvSpPr/>
-          <p:nvPr/>
-        </p:nvSpPr>
-        <p:spPr>
-          <a:xfrm>
-            <a:off x="3182112" y="4855464"/>
-            <a:ext cx="5221224" cy="146304"/>
+          <p:cNvPr id="43" name="Text 41"/>
+          <p:cNvSpPr/>
+          <p:nvPr/>
+        </p:nvSpPr>
+        <p:spPr>
+          <a:xfrm>
+            <a:off x="1078992" y="5285232"/>
+            <a:ext cx="4206240" cy="164592"/>
           </a:xfrm>
           <a:prstGeom prst="rect">
             <a:avLst/>
@@ -7597,27 +8995,136 @@
           </a:bodyPr>
           <a:lstStyle/>
           <a:p>
-            <a:pPr algn="ctr" indent="0" marL="0">
-              <a:buNone/>
-            </a:pPr>
-            <a:r>
-              <a:rPr lang="en-US" sz="1350" b="1" dirty="0">
-                <a:solidFill>
-                  <a:srgbClr val="FFFFFF"/>
-                </a:solidFill>
-                <a:latin typeface="Inter" pitchFamily="34" charset="0"/>
-                <a:ea typeface="Inter" pitchFamily="34" charset="-122"/>
-                <a:cs typeface="Inter" pitchFamily="34" charset="-120"/>
-              </a:rPr>
-              <a:t>Use the office to build the June 30 turnout plan.</a:t>
-            </a:r>
-            <a:endParaRPr lang="en-US" sz="1350" dirty="0"/>
-          </a:p>
-        </p:txBody>
-      </p:sp>
-      <p:sp>
-        <p:nvSpPr>
-          <p:cNvPr id="20" name="Text 18"/>
+            <a:pPr indent="0" marL="0">
+              <a:buNone/>
+            </a:pPr>
+            <a:r>
+              <a:rPr lang="en-US" sz="1340" b="1" dirty="0">
+                <a:solidFill>
+                  <a:srgbClr val="1F2937"/>
+                </a:solidFill>
+                <a:latin typeface="Inter" pitchFamily="34" charset="0"/>
+                <a:ea typeface="Inter" pitchFamily="34" charset="-122"/>
+                <a:cs typeface="Inter" pitchFamily="34" charset="-120"/>
+              </a:rPr>
+              <a:t>Lack of funds: Union/HR meet on alternatives if requested.</a:t>
+            </a:r>
+            <a:endParaRPr lang="en-US" sz="1340" dirty="0"/>
+          </a:p>
+        </p:txBody>
+      </p:sp>
+      <p:sp>
+        <p:nvSpPr>
+          <p:cNvPr id="44" name="Shape 42"/>
+          <p:cNvSpPr/>
+          <p:nvPr/>
+        </p:nvSpPr>
+        <p:spPr>
+          <a:xfrm>
+            <a:off x="5833872" y="5074920"/>
+            <a:ext cx="4974336" cy="658368"/>
+          </a:xfrm>
+          <a:prstGeom prst="roundRect">
+            <a:avLst>
+              <a:gd name="adj" fmla="val 11111"/>
+            </a:avLst>
+          </a:prstGeom>
+          <a:solidFill>
+            <a:srgbClr val="FEF3C7"/>
+          </a:solidFill>
+          <a:ln w="12700">
+            <a:solidFill>
+              <a:srgbClr val="FCD34D"/>
+            </a:solidFill>
+            <a:prstDash val="solid"/>
+          </a:ln>
+        </p:spPr>
+      </p:sp>
+      <p:sp>
+        <p:nvSpPr>
+          <p:cNvPr id="45" name="Text 43"/>
+          <p:cNvSpPr/>
+          <p:nvPr/>
+        </p:nvSpPr>
+        <p:spPr>
+          <a:xfrm>
+            <a:off x="6108192" y="5285232"/>
+            <a:ext cx="4462272" cy="164592"/>
+          </a:xfrm>
+          <a:prstGeom prst="rect">
+            <a:avLst/>
+          </a:prstGeom>
+          <a:noFill/>
+          <a:ln/>
+        </p:spPr>
+        <p:txBody>
+          <a:bodyPr wrap="square" lIns="0" tIns="0" rIns="0" bIns="0" rtlCol="0" anchor="ctr">
+            <a:normAutofit/>
+          </a:bodyPr>
+          <a:lstStyle/>
+          <a:p>
+            <a:pPr indent="0" marL="0">
+              <a:buNone/>
+            </a:pPr>
+            <a:r>
+              <a:rPr lang="en-US" sz="1340" b="1" dirty="0">
+                <a:solidFill>
+                  <a:srgbClr val="1F2937"/>
+                </a:solidFill>
+                <a:latin typeface="Inter" pitchFamily="34" charset="0"/>
+                <a:ea typeface="Inter" pitchFamily="34" charset="-122"/>
+                <a:cs typeface="Inter" pitchFamily="34" charset="-120"/>
+              </a:rPr>
+              <a:t>Lack of work over 15 days triggers Article 44.</a:t>
+            </a:r>
+            <a:endParaRPr lang="en-US" sz="1340" dirty="0"/>
+          </a:p>
+        </p:txBody>
+      </p:sp>
+      <p:sp>
+        <p:nvSpPr>
+          <p:cNvPr id="46" name="Text 44"/>
+          <p:cNvSpPr/>
+          <p:nvPr/>
+        </p:nvSpPr>
+        <p:spPr>
+          <a:xfrm>
+            <a:off x="658368" y="6272784"/>
+            <a:ext cx="10872216" cy="146304"/>
+          </a:xfrm>
+          <a:prstGeom prst="rect">
+            <a:avLst/>
+          </a:prstGeom>
+          <a:noFill/>
+          <a:ln/>
+        </p:spPr>
+        <p:txBody>
+          <a:bodyPr wrap="square" lIns="0" tIns="0" rIns="0" bIns="0" rtlCol="0" anchor="ctr">
+            <a:normAutofit/>
+          </a:bodyPr>
+          <a:lstStyle/>
+          <a:p>
+            <a:pPr indent="0" marL="0">
+              <a:buNone/>
+            </a:pPr>
+            <a:r>
+              <a:rPr lang="en-US" sz="840" dirty="0">
+                <a:solidFill>
+                  <a:srgbClr val="6B7280"/>
+                </a:solidFill>
+                <a:latin typeface="Inter" pitchFamily="34" charset="0"/>
+                <a:ea typeface="Inter" pitchFamily="34" charset="-122"/>
+                <a:cs typeface="Inter" pitchFamily="34" charset="-120"/>
+              </a:rPr>
+              <a:t>Sources: CBA Art. 44 Secs. 1, 3(A), 3(E), 3(F), 10-11; Art. 50 Sec. 12.</a:t>
+            </a:r>
+            <a:endParaRPr lang="en-US" sz="840" dirty="0"/>
+          </a:p>
+        </p:txBody>
+      </p:sp>
+      <p:sp>
+        <p:nvSpPr>
+          <p:cNvPr id="47" name="Text 45"/>
           <p:cNvSpPr/>
           <p:nvPr/>
         </p:nvSpPr>
@@ -7656,7 +9163,7 @@
       </p:sp>
       <p:sp>
         <p:nvSpPr>
-          <p:cNvPr id="21" name="Text 19"/>
+          <p:cNvPr id="48" name="Text 46"/>
           <p:cNvSpPr/>
           <p:nvPr/>
         </p:nvSpPr>
@@ -7797,7 +9304,7 @@
                 <a:ea typeface="Inter" pitchFamily="34" charset="-122"/>
                 <a:cs typeface="Inter" pitchFamily="34" charset="-120"/>
               </a:rPr>
-              <a:t>Legislative outreach</a:t>
+              <a:t>Local 083 office</a:t>
             </a:r>
             <a:endParaRPr lang="en-US" sz="880" dirty="0"/>
           </a:p>
@@ -7898,7 +9405,7 @@
                 <a:ea typeface="Lora" pitchFamily="34" charset="-122"/>
                 <a:cs typeface="Lora" pitchFamily="34" charset="-120"/>
               </a:rPr>
-              <a:t>Members need to talk with lawmakers</a:t>
+              <a:t>We have a new office</a:t>
             </a:r>
             <a:endParaRPr lang="en-US" sz="2614" dirty="0"/>
           </a:p>
@@ -7939,7 +9446,7 @@
                 <a:ea typeface="Inter" pitchFamily="34" charset="-122"/>
                 <a:cs typeface="Inter" pitchFamily="34" charset="-120"/>
               </a:rPr>
-              <a:t>We are looking for members to meet with Oregon House and Senate members before the rally.</a:t>
+              <a:t>This is organizing capacity: a place for questions, planning, outreach, and member follow-up.</a:t>
             </a:r>
             <a:endParaRPr lang="en-US" sz="1800" dirty="0"/>
           </a:p>
@@ -7953,121 +9460,12 @@
         </p:nvSpPr>
         <p:spPr>
           <a:xfrm>
-            <a:off x="822960" y="2487168"/>
-            <a:ext cx="4754880" cy="2999232"/>
+            <a:off x="822960" y="2560320"/>
+            <a:ext cx="9966960" cy="2697480"/>
           </a:xfrm>
           <a:prstGeom prst="roundRect">
             <a:avLst>
-              <a:gd name="adj" fmla="val 2439"/>
-            </a:avLst>
-          </a:prstGeom>
-          <a:solidFill>
-            <a:srgbClr val="F5F3FF"/>
-          </a:solidFill>
-          <a:ln w="12700">
-            <a:solidFill>
-              <a:srgbClr val="EDE9FE"/>
-            </a:solidFill>
-            <a:prstDash val="solid"/>
-          </a:ln>
-        </p:spPr>
-      </p:sp>
-      <p:sp>
-        <p:nvSpPr>
-          <p:cNvPr id="9" name="Text 7"/>
-          <p:cNvSpPr/>
-          <p:nvPr/>
-        </p:nvSpPr>
-        <p:spPr>
-          <a:xfrm>
-            <a:off x="1143000" y="2834640"/>
-            <a:ext cx="4041648" cy="566928"/>
-          </a:xfrm>
-          <a:prstGeom prst="rect">
-            <a:avLst/>
-          </a:prstGeom>
-          <a:noFill/>
-          <a:ln/>
-        </p:spPr>
-        <p:txBody>
-          <a:bodyPr wrap="square" lIns="0" tIns="0" rIns="0" bIns="0" rtlCol="0" anchor="ctr">
-            <a:normAutofit/>
-          </a:bodyPr>
-          <a:lstStyle/>
-          <a:p>
-            <a:pPr indent="0" marL="0">
-              <a:buNone/>
-            </a:pPr>
-            <a:r>
-              <a:rPr lang="en-US" sz="2800" b="1" dirty="0">
-                <a:solidFill>
-                  <a:srgbClr val="4C1D95"/>
-                </a:solidFill>
-                <a:latin typeface="Lora" pitchFamily="34" charset="0"/>
-                <a:ea typeface="Lora" pitchFamily="34" charset="-122"/>
-                <a:cs typeface="Lora" pitchFamily="34" charset="-120"/>
-              </a:rPr>
-              <a:t>You do not need to be a policy expert.</a:t>
-            </a:r>
-            <a:endParaRPr lang="en-US" sz="2800" dirty="0"/>
-          </a:p>
-        </p:txBody>
-      </p:sp>
-      <p:sp>
-        <p:nvSpPr>
-          <p:cNvPr id="10" name="Text 8"/>
-          <p:cNvSpPr/>
-          <p:nvPr/>
-        </p:nvSpPr>
-        <p:spPr>
-          <a:xfrm>
-            <a:off x="1143000" y="3822192"/>
-            <a:ext cx="3931920" cy="786384"/>
-          </a:xfrm>
-          <a:prstGeom prst="rect">
-            <a:avLst/>
-          </a:prstGeom>
-          <a:noFill/>
-          <a:ln/>
-        </p:spPr>
-        <p:txBody>
-          <a:bodyPr wrap="square" lIns="0" tIns="0" rIns="0" bIns="0" rtlCol="0" anchor="ctr">
-            <a:normAutofit/>
-          </a:bodyPr>
-          <a:lstStyle/>
-          <a:p>
-            <a:pPr indent="0" marL="0">
-              <a:buNone/>
-            </a:pPr>
-            <a:r>
-              <a:rPr lang="en-US" sz="1800" dirty="0">
-                <a:solidFill>
-                  <a:srgbClr val="1F2937"/>
-                </a:solidFill>
-                <a:latin typeface="Inter" pitchFamily="34" charset="0"/>
-                <a:ea typeface="Inter" pitchFamily="34" charset="-122"/>
-                <a:cs typeface="Inter" pitchFamily="34" charset="-120"/>
-              </a:rPr>
-              <a:t>You need to be able to explain what your job is, what OSU workers are facing, and why this contract matters.</a:t>
-            </a:r>
-            <a:endParaRPr lang="en-US" sz="1800" dirty="0"/>
-          </a:p>
-        </p:txBody>
-      </p:sp>
-      <p:sp>
-        <p:nvSpPr>
-          <p:cNvPr id="11" name="Shape 9"/>
-          <p:cNvSpPr/>
-          <p:nvPr/>
-        </p:nvSpPr>
-        <p:spPr>
-          <a:xfrm>
-            <a:off x="6053328" y="2487168"/>
-            <a:ext cx="4754880" cy="2999232"/>
-          </a:xfrm>
-          <a:prstGeom prst="roundRect">
-            <a:avLst>
-              <a:gd name="adj" fmla="val 2439"/>
+              <a:gd name="adj" fmla="val 2712"/>
             </a:avLst>
           </a:prstGeom>
           <a:solidFill>
@@ -8083,14 +9481,41 @@
       </p:sp>
       <p:sp>
         <p:nvSpPr>
-          <p:cNvPr id="12" name="Text 10"/>
-          <p:cNvSpPr/>
-          <p:nvPr/>
-        </p:nvSpPr>
-        <p:spPr>
-          <a:xfrm>
-            <a:off x="6382512" y="2788920"/>
-            <a:ext cx="3566160" cy="146304"/>
+          <p:cNvPr id="9" name="Shape 7"/>
+          <p:cNvSpPr/>
+          <p:nvPr/>
+        </p:nvSpPr>
+        <p:spPr>
+          <a:xfrm>
+            <a:off x="1234440" y="2999232"/>
+            <a:ext cx="2423160" cy="1243584"/>
+          </a:xfrm>
+          <a:prstGeom prst="roundRect">
+            <a:avLst>
+              <a:gd name="adj" fmla="val 5882"/>
+            </a:avLst>
+          </a:prstGeom>
+          <a:solidFill>
+            <a:srgbClr val="F9FAFB"/>
+          </a:solidFill>
+          <a:ln w="12700">
+            <a:solidFill>
+              <a:srgbClr val="E5E7EB"/>
+            </a:solidFill>
+            <a:prstDash val="solid"/>
+          </a:ln>
+        </p:spPr>
+      </p:sp>
+      <p:sp>
+        <p:nvSpPr>
+          <p:cNvPr id="10" name="Text 8"/>
+          <p:cNvSpPr/>
+          <p:nvPr/>
+        </p:nvSpPr>
+        <p:spPr>
+          <a:xfrm>
+            <a:off x="1444752" y="3218688"/>
+            <a:ext cx="1920240" cy="201168"/>
           </a:xfrm>
           <a:prstGeom prst="rect">
             <a:avLst/>
@@ -8102,135 +9527,350 @@
           <a:bodyPr wrap="square" lIns="0" tIns="0" rIns="0" bIns="0" rtlCol="0" anchor="ctr"/>
           <a:lstStyle/>
           <a:p>
-            <a:pPr indent="0" marL="0">
-              <a:buNone/>
-            </a:pPr>
-            <a:r>
-              <a:rPr lang="en-US" sz="950" b="1" dirty="0">
+            <a:pPr algn="ctr" indent="0" marL="0">
+              <a:buNone/>
+            </a:pPr>
+            <a:r>
+              <a:rPr lang="en-US" sz="2200" b="1" dirty="0">
                 <a:solidFill>
                   <a:srgbClr val="4C1D95"/>
                 </a:solidFill>
-                <a:latin typeface="Inter" pitchFamily="34" charset="0"/>
-                <a:ea typeface="Inter" pitchFamily="34" charset="-122"/>
-                <a:cs typeface="Inter" pitchFamily="34" charset="-120"/>
-              </a:rPr>
-              <a:t>STORIES LAWMAKERS NEED TO HEAR</a:t>
-            </a:r>
-            <a:endParaRPr lang="en-US" sz="950" dirty="0"/>
-          </a:p>
-        </p:txBody>
-      </p:sp>
-      <p:sp>
-        <p:nvSpPr>
-          <p:cNvPr id="13" name="Text 11"/>
-          <p:cNvSpPr/>
-          <p:nvPr/>
-        </p:nvSpPr>
-        <p:spPr>
-          <a:xfrm>
-            <a:off x="6400800" y="3246120"/>
-            <a:ext cx="3703320" cy="1783080"/>
-          </a:xfrm>
-          <a:prstGeom prst="rect">
-            <a:avLst/>
-          </a:prstGeom>
-          <a:noFill/>
-          <a:ln/>
-        </p:spPr>
-        <p:txBody>
-          <a:bodyPr wrap="square" lIns="0" tIns="0" rIns="0" bIns="0" rtlCol="0" anchor="t">
+                <a:latin typeface="Lora" pitchFamily="34" charset="0"/>
+                <a:ea typeface="Lora" pitchFamily="34" charset="-122"/>
+                <a:cs typeface="Lora" pitchFamily="34" charset="-120"/>
+              </a:rPr>
+              <a:t>Meet</a:t>
+            </a:r>
+            <a:endParaRPr lang="en-US" sz="2200" dirty="0"/>
+          </a:p>
+        </p:txBody>
+      </p:sp>
+      <p:sp>
+        <p:nvSpPr>
+          <p:cNvPr id="11" name="Text 9"/>
+          <p:cNvSpPr/>
+          <p:nvPr/>
+        </p:nvSpPr>
+        <p:spPr>
+          <a:xfrm>
+            <a:off x="1444752" y="3566160"/>
+            <a:ext cx="1920240" cy="365760"/>
+          </a:xfrm>
+          <a:prstGeom prst="rect">
+            <a:avLst/>
+          </a:prstGeom>
+          <a:noFill/>
+          <a:ln/>
+        </p:spPr>
+        <p:txBody>
+          <a:bodyPr wrap="square" lIns="0" tIns="0" rIns="0" bIns="0" rtlCol="0" anchor="ctr">
             <a:normAutofit/>
           </a:bodyPr>
           <a:lstStyle/>
           <a:p>
-            <a:pPr marL="190500" indent="-190500">
-              <a:spcAft>
-                <a:spcPts val="200"/>
-              </a:spcAft>
-              <a:buSzPct val="100000"/>
-              <a:buChar char="•"/>
-            </a:pPr>
-            <a:r>
-              <a:rPr lang="en-US" sz="1680" dirty="0">
-                <a:solidFill>
-                  <a:srgbClr val="1F2937"/>
-                </a:solidFill>
-                <a:latin typeface="Inter" pitchFamily="34" charset="0"/>
-                <a:ea typeface="Inter" pitchFamily="34" charset="-122"/>
-                <a:cs typeface="Inter" pitchFamily="34" charset="-120"/>
-              </a:rPr>
-              <a:t>Wages and cost of living</a:t>
-            </a:r>
-            <a:endParaRPr lang="en-US" sz="1680" dirty="0"/>
-          </a:p>
-          <a:p>
-            <a:pPr marL="190500" indent="-190500">
-              <a:spcAft>
-                <a:spcPts val="200"/>
-              </a:spcAft>
-              <a:buSzPct val="100000"/>
-              <a:buChar char="•"/>
-            </a:pPr>
-            <a:r>
-              <a:rPr lang="en-US" sz="1680" dirty="0">
-                <a:solidFill>
-                  <a:srgbClr val="1F2937"/>
-                </a:solidFill>
-                <a:latin typeface="Inter" pitchFamily="34" charset="0"/>
-                <a:ea typeface="Inter" pitchFamily="34" charset="-122"/>
-                <a:cs typeface="Inter" pitchFamily="34" charset="-120"/>
-              </a:rPr>
-              <a:t>Staffing and workload</a:t>
-            </a:r>
-            <a:endParaRPr lang="en-US" sz="1680" dirty="0"/>
-          </a:p>
-          <a:p>
-            <a:pPr marL="190500" indent="-190500">
-              <a:spcAft>
-                <a:spcPts val="200"/>
-              </a:spcAft>
-              <a:buSzPct val="100000"/>
-              <a:buChar char="•"/>
-            </a:pPr>
-            <a:r>
-              <a:rPr lang="en-US" sz="1680" dirty="0">
-                <a:solidFill>
-                  <a:srgbClr val="1F2937"/>
-                </a:solidFill>
-                <a:latin typeface="Inter" pitchFamily="34" charset="0"/>
-                <a:ea typeface="Inter" pitchFamily="34" charset="-122"/>
-                <a:cs typeface="Inter" pitchFamily="34" charset="-120"/>
-              </a:rPr>
-              <a:t>Layoffs and job security</a:t>
-            </a:r>
-            <a:endParaRPr lang="en-US" sz="1680" dirty="0"/>
-          </a:p>
-          <a:p>
-            <a:pPr marL="190500" indent="-190500">
-              <a:spcAft>
-                <a:spcPts val="200"/>
-              </a:spcAft>
-              <a:buSzPct val="100000"/>
-              <a:buChar char="•"/>
-            </a:pPr>
-            <a:r>
-              <a:rPr lang="en-US" sz="1680" dirty="0">
-                <a:solidFill>
-                  <a:srgbClr val="1F2937"/>
-                </a:solidFill>
-                <a:latin typeface="Inter" pitchFamily="34" charset="0"/>
-                <a:ea typeface="Inter" pitchFamily="34" charset="-122"/>
-                <a:cs typeface="Inter" pitchFamily="34" charset="-120"/>
-              </a:rPr>
-              <a:t>How classified staff keep OSU running</a:t>
-            </a:r>
-            <a:endParaRPr lang="en-US" sz="1680" dirty="0"/>
+            <a:pPr algn="ctr" indent="0" marL="0">
+              <a:buNone/>
+            </a:pPr>
+            <a:r>
+              <a:rPr lang="en-US" sz="1320" dirty="0">
+                <a:solidFill>
+                  <a:srgbClr val="374151"/>
+                </a:solidFill>
+                <a:latin typeface="Inter" pitchFamily="34" charset="0"/>
+                <a:ea typeface="Inter" pitchFamily="34" charset="-122"/>
+                <a:cs typeface="Inter" pitchFamily="34" charset="-120"/>
+              </a:rPr>
+              <a:t>Members can talk through questions and next steps.</a:t>
+            </a:r>
+            <a:endParaRPr lang="en-US" sz="1320" dirty="0"/>
+          </a:p>
+        </p:txBody>
+      </p:sp>
+      <p:sp>
+        <p:nvSpPr>
+          <p:cNvPr id="12" name="Shape 10"/>
+          <p:cNvSpPr/>
+          <p:nvPr/>
+        </p:nvSpPr>
+        <p:spPr>
+          <a:xfrm>
+            <a:off x="4297680" y="2999232"/>
+            <a:ext cx="2423160" cy="1243584"/>
+          </a:xfrm>
+          <a:prstGeom prst="roundRect">
+            <a:avLst>
+              <a:gd name="adj" fmla="val 5882"/>
+            </a:avLst>
+          </a:prstGeom>
+          <a:solidFill>
+            <a:srgbClr val="F5F3FF"/>
+          </a:solidFill>
+          <a:ln w="12700">
+            <a:solidFill>
+              <a:srgbClr val="E5E7EB"/>
+            </a:solidFill>
+            <a:prstDash val="solid"/>
+          </a:ln>
+        </p:spPr>
+      </p:sp>
+      <p:sp>
+        <p:nvSpPr>
+          <p:cNvPr id="13" name="Text 11"/>
+          <p:cNvSpPr/>
+          <p:nvPr/>
+        </p:nvSpPr>
+        <p:spPr>
+          <a:xfrm>
+            <a:off x="4507992" y="3218688"/>
+            <a:ext cx="1920240" cy="201168"/>
+          </a:xfrm>
+          <a:prstGeom prst="rect">
+            <a:avLst/>
+          </a:prstGeom>
+          <a:noFill/>
+          <a:ln/>
+        </p:spPr>
+        <p:txBody>
+          <a:bodyPr wrap="square" lIns="0" tIns="0" rIns="0" bIns="0" rtlCol="0" anchor="ctr"/>
+          <a:lstStyle/>
+          <a:p>
+            <a:pPr algn="ctr" indent="0" marL="0">
+              <a:buNone/>
+            </a:pPr>
+            <a:r>
+              <a:rPr lang="en-US" sz="2200" b="1" dirty="0">
+                <a:solidFill>
+                  <a:srgbClr val="4C1D95"/>
+                </a:solidFill>
+                <a:latin typeface="Lora" pitchFamily="34" charset="0"/>
+                <a:ea typeface="Lora" pitchFamily="34" charset="-122"/>
+                <a:cs typeface="Lora" pitchFamily="34" charset="-120"/>
+              </a:rPr>
+              <a:t>Plan</a:t>
+            </a:r>
+            <a:endParaRPr lang="en-US" sz="2200" dirty="0"/>
           </a:p>
         </p:txBody>
       </p:sp>
       <p:sp>
         <p:nvSpPr>
           <p:cNvPr id="14" name="Text 12"/>
+          <p:cNvSpPr/>
+          <p:nvPr/>
+        </p:nvSpPr>
+        <p:spPr>
+          <a:xfrm>
+            <a:off x="4507992" y="3566160"/>
+            <a:ext cx="1920240" cy="365760"/>
+          </a:xfrm>
+          <a:prstGeom prst="rect">
+            <a:avLst/>
+          </a:prstGeom>
+          <a:noFill/>
+          <a:ln/>
+        </p:spPr>
+        <p:txBody>
+          <a:bodyPr wrap="square" lIns="0" tIns="0" rIns="0" bIns="0" rtlCol="0" anchor="ctr">
+            <a:normAutofit/>
+          </a:bodyPr>
+          <a:lstStyle/>
+          <a:p>
+            <a:pPr algn="ctr" indent="0" marL="0">
+              <a:buNone/>
+            </a:pPr>
+            <a:r>
+              <a:rPr lang="en-US" sz="1320" dirty="0">
+                <a:solidFill>
+                  <a:srgbClr val="374151"/>
+                </a:solidFill>
+                <a:latin typeface="Inter" pitchFamily="34" charset="0"/>
+                <a:ea typeface="Inter" pitchFamily="34" charset="-122"/>
+                <a:cs typeface="Inter" pitchFamily="34" charset="-120"/>
+              </a:rPr>
+              <a:t>We can prep outreach, materials, and rally turnout.</a:t>
+            </a:r>
+            <a:endParaRPr lang="en-US" sz="1320" dirty="0"/>
+          </a:p>
+        </p:txBody>
+      </p:sp>
+      <p:sp>
+        <p:nvSpPr>
+          <p:cNvPr id="15" name="Shape 13"/>
+          <p:cNvSpPr/>
+          <p:nvPr/>
+        </p:nvSpPr>
+        <p:spPr>
+          <a:xfrm>
+            <a:off x="7360920" y="2999232"/>
+            <a:ext cx="2423160" cy="1243584"/>
+          </a:xfrm>
+          <a:prstGeom prst="roundRect">
+            <a:avLst>
+              <a:gd name="adj" fmla="val 5882"/>
+            </a:avLst>
+          </a:prstGeom>
+          <a:solidFill>
+            <a:srgbClr val="F9FAFB"/>
+          </a:solidFill>
+          <a:ln w="12700">
+            <a:solidFill>
+              <a:srgbClr val="E5E7EB"/>
+            </a:solidFill>
+            <a:prstDash val="solid"/>
+          </a:ln>
+        </p:spPr>
+      </p:sp>
+      <p:sp>
+        <p:nvSpPr>
+          <p:cNvPr id="16" name="Text 14"/>
+          <p:cNvSpPr/>
+          <p:nvPr/>
+        </p:nvSpPr>
+        <p:spPr>
+          <a:xfrm>
+            <a:off x="7571232" y="3218688"/>
+            <a:ext cx="1920240" cy="201168"/>
+          </a:xfrm>
+          <a:prstGeom prst="rect">
+            <a:avLst/>
+          </a:prstGeom>
+          <a:noFill/>
+          <a:ln/>
+        </p:spPr>
+        <p:txBody>
+          <a:bodyPr wrap="square" lIns="0" tIns="0" rIns="0" bIns="0" rtlCol="0" anchor="ctr"/>
+          <a:lstStyle/>
+          <a:p>
+            <a:pPr algn="ctr" indent="0" marL="0">
+              <a:buNone/>
+            </a:pPr>
+            <a:r>
+              <a:rPr lang="en-US" sz="2200" b="1" dirty="0">
+                <a:solidFill>
+                  <a:srgbClr val="4C1D95"/>
+                </a:solidFill>
+                <a:latin typeface="Lora" pitchFamily="34" charset="0"/>
+                <a:ea typeface="Lora" pitchFamily="34" charset="-122"/>
+                <a:cs typeface="Lora" pitchFamily="34" charset="-120"/>
+              </a:rPr>
+              <a:t>Follow up</a:t>
+            </a:r>
+            <a:endParaRPr lang="en-US" sz="2200" dirty="0"/>
+          </a:p>
+        </p:txBody>
+      </p:sp>
+      <p:sp>
+        <p:nvSpPr>
+          <p:cNvPr id="17" name="Text 15"/>
+          <p:cNvSpPr/>
+          <p:nvPr/>
+        </p:nvSpPr>
+        <p:spPr>
+          <a:xfrm>
+            <a:off x="7571232" y="3566160"/>
+            <a:ext cx="1920240" cy="365760"/>
+          </a:xfrm>
+          <a:prstGeom prst="rect">
+            <a:avLst/>
+          </a:prstGeom>
+          <a:noFill/>
+          <a:ln/>
+        </p:spPr>
+        <p:txBody>
+          <a:bodyPr wrap="square" lIns="0" tIns="0" rIns="0" bIns="0" rtlCol="0" anchor="ctr">
+            <a:normAutofit/>
+          </a:bodyPr>
+          <a:lstStyle/>
+          <a:p>
+            <a:pPr algn="ctr" indent="0" marL="0">
+              <a:buNone/>
+            </a:pPr>
+            <a:r>
+              <a:rPr lang="en-US" sz="1320" dirty="0">
+                <a:solidFill>
+                  <a:srgbClr val="374151"/>
+                </a:solidFill>
+                <a:latin typeface="Inter" pitchFamily="34" charset="0"/>
+                <a:ea typeface="Inter" pitchFamily="34" charset="-122"/>
+                <a:cs typeface="Inter" pitchFamily="34" charset="-120"/>
+              </a:rPr>
+              <a:t>We can connect members with stewards and leaders.</a:t>
+            </a:r>
+            <a:endParaRPr lang="en-US" sz="1320" dirty="0"/>
+          </a:p>
+        </p:txBody>
+      </p:sp>
+      <p:sp>
+        <p:nvSpPr>
+          <p:cNvPr id="18" name="Shape 16"/>
+          <p:cNvSpPr/>
+          <p:nvPr/>
+        </p:nvSpPr>
+        <p:spPr>
+          <a:xfrm>
+            <a:off x="3072384" y="4736592"/>
+            <a:ext cx="5440680" cy="457200"/>
+          </a:xfrm>
+          <a:prstGeom prst="roundRect">
+            <a:avLst>
+              <a:gd name="adj" fmla="val 16000"/>
+            </a:avLst>
+          </a:prstGeom>
+          <a:solidFill>
+            <a:srgbClr val="4C1D95"/>
+          </a:solidFill>
+          <a:ln w="12700">
+            <a:solidFill>
+              <a:srgbClr val="4C1D95"/>
+            </a:solidFill>
+            <a:prstDash val="solid"/>
+          </a:ln>
+        </p:spPr>
+      </p:sp>
+      <p:sp>
+        <p:nvSpPr>
+          <p:cNvPr id="19" name="Text 17"/>
+          <p:cNvSpPr/>
+          <p:nvPr/>
+        </p:nvSpPr>
+        <p:spPr>
+          <a:xfrm>
+            <a:off x="3182112" y="4855464"/>
+            <a:ext cx="5221224" cy="146304"/>
+          </a:xfrm>
+          <a:prstGeom prst="rect">
+            <a:avLst/>
+          </a:prstGeom>
+          <a:noFill/>
+          <a:ln/>
+        </p:spPr>
+        <p:txBody>
+          <a:bodyPr wrap="square" lIns="0" tIns="0" rIns="0" bIns="0" rtlCol="0" anchor="ctr">
+            <a:normAutofit/>
+          </a:bodyPr>
+          <a:lstStyle/>
+          <a:p>
+            <a:pPr algn="ctr" indent="0" marL="0">
+              <a:buNone/>
+            </a:pPr>
+            <a:r>
+              <a:rPr lang="en-US" sz="1350" b="1" dirty="0">
+                <a:solidFill>
+                  <a:srgbClr val="FFFFFF"/>
+                </a:solidFill>
+                <a:latin typeface="Inter" pitchFamily="34" charset="0"/>
+                <a:ea typeface="Inter" pitchFamily="34" charset="-122"/>
+                <a:cs typeface="Inter" pitchFamily="34" charset="-120"/>
+              </a:rPr>
+              <a:t>Use the office to build the June 30 turnout plan.</a:t>
+            </a:r>
+            <a:endParaRPr lang="en-US" sz="1350" dirty="0"/>
+          </a:p>
+        </p:txBody>
+      </p:sp>
+      <p:sp>
+        <p:nvSpPr>
+          <p:cNvPr id="20" name="Text 18"/>
           <p:cNvSpPr/>
           <p:nvPr/>
         </p:nvSpPr>
@@ -8269,7 +9909,7 @@
       </p:sp>
       <p:sp>
         <p:nvSpPr>
-          <p:cNvPr id="15" name="Text 13"/>
+          <p:cNvPr id="21" name="Text 19"/>
           <p:cNvSpPr/>
           <p:nvPr/>
         </p:nvSpPr>
@@ -8320,7 +9960,7 @@
     <p:bg>
       <p:bgPr>
         <a:solidFill>
-          <a:srgbClr val="4C1D95"/>
+          <a:srgbClr val="F9FAFB"/>
         </a:solidFill>
       </p:bgPr>
     </p:bg>
@@ -8338,53 +9978,248 @@
           <a:chExt cx="0" cy="0"/>
         </a:xfrm>
       </p:grpSpPr>
-      <p:pic>
-        <p:nvPicPr>
-          <p:cNvPr id="2" name="Image 0" descr="/Users/jaxsnjohnson/github/seiu-website/resources/zoom-backgrounds/2026-bargaining/SEIU-503-Bargaining-2026-Campus-Landscape.png">    </p:cNvPr>
-          <p:cNvPicPr>
-            <a:picLocks noChangeAspect="1"/>
-          </p:cNvPicPr>
-          <p:nvPr/>
-        </p:nvPicPr>
-        <p:blipFill>
-          <a:blip r:embed="rId1"/>
-          <a:srcRect l="1" r="1" t="0" b="0"/>
-          <a:stretch/>
-        </p:blipFill>
-        <p:spPr>
-          <a:xfrm>
-            <a:off x="0" y="0"/>
-            <a:ext cx="12191695" cy="6858000"/>
-          </a:xfrm>
-          <a:prstGeom prst="rect">
-            <a:avLst/>
-          </a:prstGeom>
-        </p:spPr>
-      </p:pic>
-      <p:sp>
-        <p:nvSpPr>
-          <p:cNvPr id="3" name="Shape 0"/>
-          <p:cNvSpPr/>
-          <p:nvPr/>
-        </p:nvSpPr>
-        <p:spPr>
-          <a:xfrm>
-            <a:off x="0" y="0"/>
-            <a:ext cx="12191695" cy="6858000"/>
-          </a:xfrm>
-          <a:prstGeom prst="rect">
-            <a:avLst/>
+      <p:sp>
+        <p:nvSpPr>
+          <p:cNvPr id="2" name="Text 0"/>
+          <p:cNvSpPr/>
+          <p:nvPr/>
+        </p:nvSpPr>
+        <p:spPr>
+          <a:xfrm>
+            <a:off x="658368" y="347472"/>
+            <a:ext cx="5303520" cy="164592"/>
+          </a:xfrm>
+          <a:prstGeom prst="rect">
+            <a:avLst/>
+          </a:prstGeom>
+          <a:noFill/>
+          <a:ln/>
+        </p:spPr>
+        <p:txBody>
+          <a:bodyPr wrap="square" lIns="0" tIns="0" rIns="0" bIns="0" rtlCol="0" anchor="ctr"/>
+          <a:lstStyle/>
+          <a:p>
+            <a:pPr indent="0" marL="0">
+              <a:buNone/>
+            </a:pPr>
+            <a:r>
+              <a:rPr lang="en-US" sz="920" b="1" dirty="0">
+                <a:solidFill>
+                  <a:srgbClr val="4C1D95"/>
+                </a:solidFill>
+                <a:latin typeface="Inter" pitchFamily="34" charset="0"/>
+                <a:ea typeface="Inter" pitchFamily="34" charset="-122"/>
+                <a:cs typeface="Inter" pitchFamily="34" charset="-120"/>
+              </a:rPr>
+              <a:t>SEIU Local 503 at Oregon State University</a:t>
+            </a:r>
+            <a:endParaRPr lang="en-US" sz="920" dirty="0"/>
+          </a:p>
+        </p:txBody>
+      </p:sp>
+      <p:sp>
+        <p:nvSpPr>
+          <p:cNvPr id="3" name="Text 1"/>
+          <p:cNvSpPr/>
+          <p:nvPr/>
+        </p:nvSpPr>
+        <p:spPr>
+          <a:xfrm>
+            <a:off x="7543800" y="347472"/>
+            <a:ext cx="2926080" cy="164592"/>
+          </a:xfrm>
+          <a:prstGeom prst="rect">
+            <a:avLst/>
+          </a:prstGeom>
+          <a:noFill/>
+          <a:ln/>
+        </p:spPr>
+        <p:txBody>
+          <a:bodyPr wrap="square" lIns="0" tIns="0" rIns="0" bIns="0" rtlCol="0" anchor="ctr"/>
+          <a:lstStyle/>
+          <a:p>
+            <a:pPr algn="r" indent="0" marL="0">
+              <a:buNone/>
+            </a:pPr>
+            <a:r>
+              <a:rPr lang="en-US" sz="880" dirty="0">
+                <a:solidFill>
+                  <a:srgbClr val="6B7280"/>
+                </a:solidFill>
+                <a:latin typeface="Inter" pitchFamily="34" charset="0"/>
+                <a:ea typeface="Inter" pitchFamily="34" charset="-122"/>
+                <a:cs typeface="Inter" pitchFamily="34" charset="-120"/>
+              </a:rPr>
+              <a:t>Legislative outreach</a:t>
+            </a:r>
+            <a:endParaRPr lang="en-US" sz="880" dirty="0"/>
+          </a:p>
+        </p:txBody>
+      </p:sp>
+      <p:sp>
+        <p:nvSpPr>
+          <p:cNvPr id="4" name="Text 2"/>
+          <p:cNvSpPr/>
+          <p:nvPr/>
+        </p:nvSpPr>
+        <p:spPr>
+          <a:xfrm>
+            <a:off x="10835640" y="347472"/>
+            <a:ext cx="457200" cy="164592"/>
+          </a:xfrm>
+          <a:prstGeom prst="rect">
+            <a:avLst/>
+          </a:prstGeom>
+          <a:noFill/>
+          <a:ln/>
+        </p:spPr>
+        <p:txBody>
+          <a:bodyPr wrap="square" lIns="0" tIns="0" rIns="0" bIns="0" rtlCol="0" anchor="ctr"/>
+          <a:lstStyle/>
+          <a:p>
+            <a:pPr algn="r" indent="0" marL="0">
+              <a:buNone/>
+            </a:pPr>
+            <a:r>
+              <a:rPr lang="en-US" sz="880" dirty="0">
+                <a:solidFill>
+                  <a:srgbClr val="6B7280"/>
+                </a:solidFill>
+                <a:latin typeface="Inter" pitchFamily="34" charset="0"/>
+                <a:ea typeface="Inter" pitchFamily="34" charset="-122"/>
+                <a:cs typeface="Inter" pitchFamily="34" charset="-120"/>
+              </a:rPr>
+              <a:t>08</a:t>
+            </a:r>
+            <a:endParaRPr lang="en-US" sz="880" dirty="0"/>
+          </a:p>
+        </p:txBody>
+      </p:sp>
+      <p:sp>
+        <p:nvSpPr>
+          <p:cNvPr id="5" name="Shape 3"/>
+          <p:cNvSpPr/>
+          <p:nvPr/>
+        </p:nvSpPr>
+        <p:spPr>
+          <a:xfrm>
+            <a:off x="658368" y="713232"/>
+            <a:ext cx="10872216" cy="0"/>
+          </a:xfrm>
+          <a:prstGeom prst="line">
+            <a:avLst/>
+          </a:prstGeom>
+          <a:noFill/>
+          <a:ln w="12700">
+            <a:solidFill>
+              <a:srgbClr val="E5E7EB"/>
+            </a:solidFill>
+            <a:prstDash val="solid"/>
+          </a:ln>
+        </p:spPr>
+      </p:sp>
+      <p:sp>
+        <p:nvSpPr>
+          <p:cNvPr id="6" name="Text 4"/>
+          <p:cNvSpPr/>
+          <p:nvPr/>
+        </p:nvSpPr>
+        <p:spPr>
+          <a:xfrm>
+            <a:off x="658368" y="987552"/>
+            <a:ext cx="8686800" cy="676656"/>
+          </a:xfrm>
+          <a:prstGeom prst="rect">
+            <a:avLst/>
+          </a:prstGeom>
+          <a:noFill/>
+          <a:ln/>
+        </p:spPr>
+        <p:txBody>
+          <a:bodyPr wrap="square" lIns="0" tIns="0" rIns="0" bIns="0" rtlCol="0" anchor="ctr"/>
+          <a:lstStyle/>
+          <a:p>
+            <a:pPr indent="0" marL="0">
+              <a:buNone/>
+            </a:pPr>
+            <a:r>
+              <a:rPr lang="en-US" sz="2614" b="1" dirty="0">
+                <a:solidFill>
+                  <a:srgbClr val="4C1D95"/>
+                </a:solidFill>
+                <a:latin typeface="Lora" pitchFamily="34" charset="0"/>
+                <a:ea typeface="Lora" pitchFamily="34" charset="-122"/>
+                <a:cs typeface="Lora" pitchFamily="34" charset="-120"/>
+              </a:rPr>
+              <a:t>Members need to talk with lawmakers</a:t>
+            </a:r>
+            <a:endParaRPr lang="en-US" sz="2614" dirty="0"/>
+          </a:p>
+        </p:txBody>
+      </p:sp>
+      <p:sp>
+        <p:nvSpPr>
+          <p:cNvPr id="7" name="Text 5"/>
+          <p:cNvSpPr/>
+          <p:nvPr/>
+        </p:nvSpPr>
+        <p:spPr>
+          <a:xfrm>
+            <a:off x="658368" y="1828800"/>
+            <a:ext cx="8869680" cy="658368"/>
+          </a:xfrm>
+          <a:prstGeom prst="rect">
+            <a:avLst/>
+          </a:prstGeom>
+          <a:noFill/>
+          <a:ln/>
+        </p:spPr>
+        <p:txBody>
+          <a:bodyPr wrap="square" lIns="0" tIns="0" rIns="0" bIns="0" rtlCol="0" anchor="ctr">
+            <a:normAutofit/>
+          </a:bodyPr>
+          <a:lstStyle/>
+          <a:p>
+            <a:pPr indent="0" marL="0">
+              <a:buNone/>
+            </a:pPr>
+            <a:r>
+              <a:rPr lang="en-US" sz="1800" dirty="0">
+                <a:solidFill>
+                  <a:srgbClr val="374151"/>
+                </a:solidFill>
+                <a:latin typeface="Inter" pitchFamily="34" charset="0"/>
+                <a:ea typeface="Inter" pitchFamily="34" charset="-122"/>
+                <a:cs typeface="Inter" pitchFamily="34" charset="-120"/>
+              </a:rPr>
+              <a:t>We are looking for members to meet with Oregon House and Senate members before the rally.</a:t>
+            </a:r>
+            <a:endParaRPr lang="en-US" sz="1800" dirty="0"/>
+          </a:p>
+        </p:txBody>
+      </p:sp>
+      <p:sp>
+        <p:nvSpPr>
+          <p:cNvPr id="8" name="Shape 6"/>
+          <p:cNvSpPr/>
+          <p:nvPr/>
+        </p:nvSpPr>
+        <p:spPr>
+          <a:xfrm>
+            <a:off x="822960" y="2487168"/>
+            <a:ext cx="4754880" cy="2999232"/>
+          </a:xfrm>
+          <a:prstGeom prst="roundRect">
+            <a:avLst>
+              <a:gd name="adj" fmla="val 2439"/>
+            </a:avLst>
           </a:prstGeom>
           <a:solidFill>
-            <a:srgbClr val="4C1D95">
-              <a:alpha val="66000"/>
-            </a:srgbClr>
+            <a:srgbClr val="F5F3FF"/>
           </a:solidFill>
           <a:ln w="12700">
             <a:solidFill>
-              <a:srgbClr val="4C1D95">
-                <a:alpha val="0"/>
-              </a:srgbClr>
+              <a:srgbClr val="EDE9FE"/>
             </a:solidFill>
             <a:prstDash val="solid"/>
           </a:ln>
@@ -8392,14 +10227,14 @@
       </p:sp>
       <p:sp>
         <p:nvSpPr>
-          <p:cNvPr id="4" name="Text 1"/>
-          <p:cNvSpPr/>
-          <p:nvPr/>
-        </p:nvSpPr>
-        <p:spPr>
-          <a:xfrm>
-            <a:off x="786384" y="960120"/>
-            <a:ext cx="6035040" cy="694944"/>
+          <p:cNvPr id="9" name="Text 7"/>
+          <p:cNvSpPr/>
+          <p:nvPr/>
+        </p:nvSpPr>
+        <p:spPr>
+          <a:xfrm>
+            <a:off x="1143000" y="2834640"/>
+            <a:ext cx="4041648" cy="566928"/>
           </a:xfrm>
           <a:prstGeom prst="rect">
             <a:avLst/>
@@ -8417,30 +10252,30 @@
               <a:buNone/>
             </a:pPr>
             <a:r>
-              <a:rPr lang="en-US" sz="4400" b="1" dirty="0">
-                <a:solidFill>
-                  <a:srgbClr val="FFFFFF"/>
+              <a:rPr lang="en-US" sz="2800" b="1" dirty="0">
+                <a:solidFill>
+                  <a:srgbClr val="4C1D95"/>
                 </a:solidFill>
                 <a:latin typeface="Lora" pitchFamily="34" charset="0"/>
                 <a:ea typeface="Lora" pitchFamily="34" charset="-122"/>
                 <a:cs typeface="Lora" pitchFamily="34" charset="-120"/>
               </a:rPr>
-              <a:t>Sign-making party</a:t>
-            </a:r>
-            <a:endParaRPr lang="en-US" sz="4400" dirty="0"/>
-          </a:p>
-        </p:txBody>
-      </p:sp>
-      <p:sp>
-        <p:nvSpPr>
-          <p:cNvPr id="5" name="Text 2"/>
-          <p:cNvSpPr/>
-          <p:nvPr/>
-        </p:nvSpPr>
-        <p:spPr>
-          <a:xfrm>
-            <a:off x="822960" y="2029968"/>
-            <a:ext cx="5440680" cy="786384"/>
+              <a:t>You do not need to be a policy expert.</a:t>
+            </a:r>
+            <a:endParaRPr lang="en-US" sz="2800" dirty="0"/>
+          </a:p>
+        </p:txBody>
+      </p:sp>
+      <p:sp>
+        <p:nvSpPr>
+          <p:cNvPr id="10" name="Text 8"/>
+          <p:cNvSpPr/>
+          <p:nvPr/>
+        </p:nvSpPr>
+        <p:spPr>
+          <a:xfrm>
+            <a:off x="1143000" y="3822192"/>
+            <a:ext cx="3931920" cy="786384"/>
           </a:xfrm>
           <a:prstGeom prst="rect">
             <a:avLst/>
@@ -8458,51 +10293,34 @@
               <a:buNone/>
             </a:pPr>
             <a:r>
-              <a:rPr lang="en-US" sz="2300" b="1" dirty="0">
-                <a:solidFill>
-                  <a:srgbClr val="E9D5FF"/>
-                </a:solidFill>
-                <a:latin typeface="Inter" pitchFamily="34" charset="0"/>
-                <a:ea typeface="Inter" pitchFamily="34" charset="-122"/>
-                <a:cs typeface="Inter" pitchFamily="34" charset="-120"/>
-              </a:rPr>
-              <a:t>Monday, June 29 | 5-7 p.m.</a:t>
-            </a:r>
-            <a:endParaRPr lang="en-US" sz="2300" dirty="0"/>
-          </a:p>
-          <a:p>
-            <a:pPr indent="0" marL="0">
-              <a:buNone/>
-            </a:pPr>
-            <a:r>
-              <a:rPr lang="en-US" sz="2300" b="1" dirty="0">
-                <a:solidFill>
-                  <a:srgbClr val="E9D5FF"/>
-                </a:solidFill>
-                <a:latin typeface="Inter" pitchFamily="34" charset="0"/>
-                <a:ea typeface="Inter" pitchFamily="34" charset="-122"/>
-                <a:cs typeface="Inter" pitchFamily="34" charset="-120"/>
-              </a:rPr>
-              <a:t>Westminster House on Monroe</a:t>
-            </a:r>
-            <a:endParaRPr lang="en-US" sz="2300" dirty="0"/>
-          </a:p>
-        </p:txBody>
-      </p:sp>
-      <p:sp>
-        <p:nvSpPr>
-          <p:cNvPr id="6" name="Shape 3"/>
-          <p:cNvSpPr/>
-          <p:nvPr/>
-        </p:nvSpPr>
-        <p:spPr>
-          <a:xfrm>
-            <a:off x="822960" y="3364992"/>
-            <a:ext cx="5230368" cy="1444752"/>
+              <a:rPr lang="en-US" sz="1800" dirty="0">
+                <a:solidFill>
+                  <a:srgbClr val="1F2937"/>
+                </a:solidFill>
+                <a:latin typeface="Inter" pitchFamily="34" charset="0"/>
+                <a:ea typeface="Inter" pitchFamily="34" charset="-122"/>
+                <a:cs typeface="Inter" pitchFamily="34" charset="-120"/>
+              </a:rPr>
+              <a:t>You need to be able to explain what your job is, what OSU workers are facing, and why this contract matters.</a:t>
+            </a:r>
+            <a:endParaRPr lang="en-US" sz="1800" dirty="0"/>
+          </a:p>
+        </p:txBody>
+      </p:sp>
+      <p:sp>
+        <p:nvSpPr>
+          <p:cNvPr id="11" name="Shape 9"/>
+          <p:cNvSpPr/>
+          <p:nvPr/>
+        </p:nvSpPr>
+        <p:spPr>
+          <a:xfrm>
+            <a:off x="6053328" y="2487168"/>
+            <a:ext cx="4754880" cy="2999232"/>
           </a:xfrm>
           <a:prstGeom prst="roundRect">
             <a:avLst>
-              <a:gd name="adj" fmla="val 5063"/>
+              <a:gd name="adj" fmla="val 2439"/>
             </a:avLst>
           </a:prstGeom>
           <a:solidFill>
@@ -8510,7 +10328,7 @@
           </a:solidFill>
           <a:ln w="12700">
             <a:solidFill>
-              <a:srgbClr val="FFFFFF"/>
+              <a:srgbClr val="E5E7EB"/>
             </a:solidFill>
             <a:prstDash val="solid"/>
           </a:ln>
@@ -8518,55 +10336,200 @@
       </p:sp>
       <p:sp>
         <p:nvSpPr>
-          <p:cNvPr id="7" name="Text 4"/>
-          <p:cNvSpPr/>
-          <p:nvPr/>
-        </p:nvSpPr>
-        <p:spPr>
-          <a:xfrm>
-            <a:off x="1115568" y="3675888"/>
-            <a:ext cx="4617720" cy="566928"/>
-          </a:xfrm>
-          <a:prstGeom prst="rect">
-            <a:avLst/>
-          </a:prstGeom>
-          <a:noFill/>
-          <a:ln/>
-        </p:spPr>
-        <p:txBody>
-          <a:bodyPr wrap="square" lIns="0" tIns="0" rIns="0" bIns="0" rtlCol="0" anchor="ctr">
+          <p:cNvPr id="12" name="Text 10"/>
+          <p:cNvSpPr/>
+          <p:nvPr/>
+        </p:nvSpPr>
+        <p:spPr>
+          <a:xfrm>
+            <a:off x="6382512" y="2788920"/>
+            <a:ext cx="3566160" cy="146304"/>
+          </a:xfrm>
+          <a:prstGeom prst="rect">
+            <a:avLst/>
+          </a:prstGeom>
+          <a:noFill/>
+          <a:ln/>
+        </p:spPr>
+        <p:txBody>
+          <a:bodyPr wrap="square" lIns="0" tIns="0" rIns="0" bIns="0" rtlCol="0" anchor="ctr"/>
+          <a:lstStyle/>
+          <a:p>
+            <a:pPr indent="0" marL="0">
+              <a:buNone/>
+            </a:pPr>
+            <a:r>
+              <a:rPr lang="en-US" sz="950" b="1" dirty="0">
+                <a:solidFill>
+                  <a:srgbClr val="4C1D95"/>
+                </a:solidFill>
+                <a:latin typeface="Inter" pitchFamily="34" charset="0"/>
+                <a:ea typeface="Inter" pitchFamily="34" charset="-122"/>
+                <a:cs typeface="Inter" pitchFamily="34" charset="-120"/>
+              </a:rPr>
+              <a:t>STORIES LAWMAKERS NEED TO HEAR</a:t>
+            </a:r>
+            <a:endParaRPr lang="en-US" sz="950" dirty="0"/>
+          </a:p>
+        </p:txBody>
+      </p:sp>
+      <p:sp>
+        <p:nvSpPr>
+          <p:cNvPr id="13" name="Text 11"/>
+          <p:cNvSpPr/>
+          <p:nvPr/>
+        </p:nvSpPr>
+        <p:spPr>
+          <a:xfrm>
+            <a:off x="6400800" y="3246120"/>
+            <a:ext cx="3703320" cy="1783080"/>
+          </a:xfrm>
+          <a:prstGeom prst="rect">
+            <a:avLst/>
+          </a:prstGeom>
+          <a:noFill/>
+          <a:ln/>
+        </p:spPr>
+        <p:txBody>
+          <a:bodyPr wrap="square" lIns="0" tIns="0" rIns="0" bIns="0" rtlCol="0" anchor="t">
             <a:normAutofit/>
           </a:bodyPr>
           <a:lstStyle/>
           <a:p>
+            <a:pPr marL="190500" indent="-190500">
+              <a:spcAft>
+                <a:spcPts val="200"/>
+              </a:spcAft>
+              <a:buSzPct val="100000"/>
+              <a:buChar char="•"/>
+            </a:pPr>
+            <a:r>
+              <a:rPr lang="en-US" sz="1680" dirty="0">
+                <a:solidFill>
+                  <a:srgbClr val="1F2937"/>
+                </a:solidFill>
+                <a:latin typeface="Inter" pitchFamily="34" charset="0"/>
+                <a:ea typeface="Inter" pitchFamily="34" charset="-122"/>
+                <a:cs typeface="Inter" pitchFamily="34" charset="-120"/>
+              </a:rPr>
+              <a:t>Wages and cost of living</a:t>
+            </a:r>
+            <a:endParaRPr lang="en-US" sz="1680" dirty="0"/>
+          </a:p>
+          <a:p>
+            <a:pPr marL="190500" indent="-190500">
+              <a:spcAft>
+                <a:spcPts val="200"/>
+              </a:spcAft>
+              <a:buSzPct val="100000"/>
+              <a:buChar char="•"/>
+            </a:pPr>
+            <a:r>
+              <a:rPr lang="en-US" sz="1680" dirty="0">
+                <a:solidFill>
+                  <a:srgbClr val="1F2937"/>
+                </a:solidFill>
+                <a:latin typeface="Inter" pitchFamily="34" charset="0"/>
+                <a:ea typeface="Inter" pitchFamily="34" charset="-122"/>
+                <a:cs typeface="Inter" pitchFamily="34" charset="-120"/>
+              </a:rPr>
+              <a:t>Staffing and workload</a:t>
+            </a:r>
+            <a:endParaRPr lang="en-US" sz="1680" dirty="0"/>
+          </a:p>
+          <a:p>
+            <a:pPr marL="190500" indent="-190500">
+              <a:spcAft>
+                <a:spcPts val="200"/>
+              </a:spcAft>
+              <a:buSzPct val="100000"/>
+              <a:buChar char="•"/>
+            </a:pPr>
+            <a:r>
+              <a:rPr lang="en-US" sz="1680" dirty="0">
+                <a:solidFill>
+                  <a:srgbClr val="1F2937"/>
+                </a:solidFill>
+                <a:latin typeface="Inter" pitchFamily="34" charset="0"/>
+                <a:ea typeface="Inter" pitchFamily="34" charset="-122"/>
+                <a:cs typeface="Inter" pitchFamily="34" charset="-120"/>
+              </a:rPr>
+              <a:t>Layoffs and job security</a:t>
+            </a:r>
+            <a:endParaRPr lang="en-US" sz="1680" dirty="0"/>
+          </a:p>
+          <a:p>
+            <a:pPr marL="190500" indent="-190500">
+              <a:spcAft>
+                <a:spcPts val="200"/>
+              </a:spcAft>
+              <a:buSzPct val="100000"/>
+              <a:buChar char="•"/>
+            </a:pPr>
+            <a:r>
+              <a:rPr lang="en-US" sz="1680" dirty="0">
+                <a:solidFill>
+                  <a:srgbClr val="1F2937"/>
+                </a:solidFill>
+                <a:latin typeface="Inter" pitchFamily="34" charset="0"/>
+                <a:ea typeface="Inter" pitchFamily="34" charset="-122"/>
+                <a:cs typeface="Inter" pitchFamily="34" charset="-120"/>
+              </a:rPr>
+              <a:t>How classified staff keep OSU running</a:t>
+            </a:r>
+            <a:endParaRPr lang="en-US" sz="1680" dirty="0"/>
+          </a:p>
+        </p:txBody>
+      </p:sp>
+      <p:sp>
+        <p:nvSpPr>
+          <p:cNvPr id="14" name="Text 12"/>
+          <p:cNvSpPr/>
+          <p:nvPr/>
+        </p:nvSpPr>
+        <p:spPr>
+          <a:xfrm>
+            <a:off x="658368" y="6473952"/>
+            <a:ext cx="3383280" cy="146304"/>
+          </a:xfrm>
+          <a:prstGeom prst="rect">
+            <a:avLst/>
+          </a:prstGeom>
+          <a:noFill/>
+          <a:ln/>
+        </p:spPr>
+        <p:txBody>
+          <a:bodyPr wrap="square" lIns="0" tIns="0" rIns="0" bIns="0" rtlCol="0" anchor="ctr"/>
+          <a:lstStyle/>
+          <a:p>
             <a:pPr indent="0" marL="0">
               <a:buNone/>
             </a:pPr>
             <a:r>
-              <a:rPr lang="en-US" sz="1800" b="1" dirty="0">
-                <a:solidFill>
-                  <a:srgbClr val="1F2937"/>
-                </a:solidFill>
-                <a:latin typeface="Inter" pitchFamily="34" charset="0"/>
-                <a:ea typeface="Inter" pitchFamily="34" charset="-122"/>
-                <a:cs typeface="Inter" pitchFamily="34" charset="-120"/>
-              </a:rPr>
-              <a:t>Come make signs, bring a coworker, and help us get ready to show OSU that classified staff are organized for a fair contract.</a:t>
-            </a:r>
-            <a:endParaRPr lang="en-US" sz="1800" dirty="0"/>
-          </a:p>
-        </p:txBody>
-      </p:sp>
-      <p:sp>
-        <p:nvSpPr>
-          <p:cNvPr id="8" name="Text 5"/>
-          <p:cNvSpPr/>
-          <p:nvPr/>
-        </p:nvSpPr>
-        <p:spPr>
-          <a:xfrm>
-            <a:off x="841248" y="5486400"/>
-            <a:ext cx="5486400" cy="237744"/>
+              <a:rPr lang="en-US" sz="900" dirty="0">
+                <a:solidFill>
+                  <a:srgbClr val="6B7280"/>
+                </a:solidFill>
+                <a:latin typeface="Inter" pitchFamily="34" charset="0"/>
+                <a:ea typeface="Inter" pitchFamily="34" charset="-122"/>
+                <a:cs typeface="Inter" pitchFamily="34" charset="-120"/>
+              </a:rPr>
+              <a:t>Membership meeting | June 18, 2026</a:t>
+            </a:r>
+            <a:endParaRPr lang="en-US" sz="900" dirty="0"/>
+          </a:p>
+        </p:txBody>
+      </p:sp>
+      <p:sp>
+        <p:nvSpPr>
+          <p:cNvPr id="15" name="Text 13"/>
+          <p:cNvSpPr/>
+          <p:nvPr/>
+        </p:nvSpPr>
+        <p:spPr>
+          <a:xfrm>
+            <a:off x="8732520" y="6473952"/>
+            <a:ext cx="2514600" cy="146304"/>
           </a:xfrm>
           <a:prstGeom prst="rect">
             <a:avLst/>
@@ -8578,21 +10541,21 @@
           <a:bodyPr wrap="square" lIns="0" tIns="0" rIns="0" bIns="0" rtlCol="0" anchor="ctr"/>
           <a:lstStyle/>
           <a:p>
-            <a:pPr indent="0" marL="0">
-              <a:buNone/>
-            </a:pPr>
-            <a:r>
-              <a:rPr lang="en-US" sz="2300" b="1" dirty="0">
-                <a:solidFill>
-                  <a:srgbClr val="FFFFFF"/>
-                </a:solidFill>
-                <a:latin typeface="Lora" pitchFamily="34" charset="0"/>
-                <a:ea typeface="Lora" pitchFamily="34" charset="-122"/>
-                <a:cs typeface="Lora" pitchFamily="34" charset="-120"/>
-              </a:rPr>
-              <a:t>The night before is part of the turnout plan.</a:t>
-            </a:r>
-            <a:endParaRPr lang="en-US" sz="2300" dirty="0"/>
+            <a:pPr algn="r" indent="0" marL="0">
+              <a:buNone/>
+            </a:pPr>
+            <a:r>
+              <a:rPr lang="en-US" sz="950" b="1" dirty="0">
+                <a:solidFill>
+                  <a:srgbClr val="4C1D95"/>
+                </a:solidFill>
+                <a:latin typeface="Inter" pitchFamily="34" charset="0"/>
+                <a:ea typeface="Inter" pitchFamily="34" charset="-122"/>
+                <a:cs typeface="Inter" pitchFamily="34" charset="-120"/>
+              </a:rPr>
+              <a:t>local083.org/rally</a:t>
+            </a:r>
+            <a:endParaRPr lang="en-US" sz="950" dirty="0"/>
           </a:p>
         </p:txBody>
       </p:sp>
@@ -8630,7 +10593,7 @@
       </p:grpSpPr>
       <p:pic>
         <p:nvPicPr>
-          <p:cNvPr id="2" name="Image 0" descr="/Users/jaxsnjohnson/github/seiu-website/resources/zoom-backgrounds/2026-bargaining/SEIU-503-Bargaining-2026-Fists-Landscape.png">    </p:cNvPr>
+          <p:cNvPr id="2" name="Image 0" descr="/Users/jaxsnjohnson/github/seiu-website/resources/zoom-backgrounds/2026-bargaining/SEIU-503-Bargaining-2026-Campus-Landscape.png">    </p:cNvPr>
           <p:cNvPicPr>
             <a:picLocks noChangeAspect="1"/>
           </p:cNvPicPr>
@@ -8667,7 +10630,7 @@
           </a:prstGeom>
           <a:solidFill>
             <a:srgbClr val="4C1D95">
-              <a:alpha val="56000"/>
+              <a:alpha val="66000"/>
             </a:srgbClr>
           </a:solidFill>
           <a:ln w="12700">
@@ -8688,8 +10651,8 @@
         </p:nvSpPr>
         <p:spPr>
           <a:xfrm>
-            <a:off x="749808" y="841248"/>
-            <a:ext cx="7315200" cy="868680"/>
+            <a:off x="786384" y="960120"/>
+            <a:ext cx="6035040" cy="694944"/>
           </a:xfrm>
           <a:prstGeom prst="rect">
             <a:avLst/>
@@ -8707,7 +10670,7 @@
               <a:buNone/>
             </a:pPr>
             <a:r>
-              <a:rPr lang="en-US" sz="4200" b="1" dirty="0">
+              <a:rPr lang="en-US" sz="4400" b="1" dirty="0">
                 <a:solidFill>
                   <a:srgbClr val="FFFFFF"/>
                 </a:solidFill>
@@ -8715,9 +10678,9 @@
                 <a:ea typeface="Lora" pitchFamily="34" charset="-122"/>
                 <a:cs typeface="Lora" pitchFamily="34" charset="-120"/>
               </a:rPr>
-              <a:t>June 30: show up for our contract</a:t>
-            </a:r>
-            <a:endParaRPr lang="en-US" sz="4200" dirty="0"/>
+              <a:t>Sign-making party</a:t>
+            </a:r>
+            <a:endParaRPr lang="en-US" sz="4400" dirty="0"/>
           </a:p>
         </p:txBody>
       </p:sp>
@@ -8729,24 +10692,26 @@
         </p:nvSpPr>
         <p:spPr>
           <a:xfrm>
-            <a:off x="786384" y="1956816"/>
-            <a:ext cx="6400800" cy="256032"/>
-          </a:xfrm>
-          <a:prstGeom prst="rect">
-            <a:avLst/>
-          </a:prstGeom>
-          <a:noFill/>
-          <a:ln/>
-        </p:spPr>
-        <p:txBody>
-          <a:bodyPr wrap="square" lIns="0" tIns="0" rIns="0" bIns="0" rtlCol="0" anchor="ctr"/>
+            <a:off x="822960" y="2029968"/>
+            <a:ext cx="5440680" cy="786384"/>
+          </a:xfrm>
+          <a:prstGeom prst="rect">
+            <a:avLst/>
+          </a:prstGeom>
+          <a:noFill/>
+          <a:ln/>
+        </p:spPr>
+        <p:txBody>
+          <a:bodyPr wrap="square" lIns="0" tIns="0" rIns="0" bIns="0" rtlCol="0" anchor="ctr">
+            <a:normAutofit/>
+          </a:bodyPr>
           <a:lstStyle/>
           <a:p>
             <a:pPr indent="0" marL="0">
               <a:buNone/>
             </a:pPr>
             <a:r>
-              <a:rPr lang="en-US" sz="2100" b="1" dirty="0">
+              <a:rPr lang="en-US" sz="2300" b="1" dirty="0">
                 <a:solidFill>
                   <a:srgbClr val="E9D5FF"/>
                 </a:solidFill>
@@ -8754,9 +10719,26 @@
                 <a:ea typeface="Inter" pitchFamily="34" charset="-122"/>
                 <a:cs typeface="Inter" pitchFamily="34" charset="-120"/>
               </a:rPr>
-              <a:t>Tuesday, June 30 | Noon-1 p.m. | McNary Field</a:t>
-            </a:r>
-            <a:endParaRPr lang="en-US" sz="2100" dirty="0"/>
+              <a:t>Monday, June 29 | 5-7 p.m.</a:t>
+            </a:r>
+            <a:endParaRPr lang="en-US" sz="2300" dirty="0"/>
+          </a:p>
+          <a:p>
+            <a:pPr indent="0" marL="0">
+              <a:buNone/>
+            </a:pPr>
+            <a:r>
+              <a:rPr lang="en-US" sz="2300" b="1" dirty="0">
+                <a:solidFill>
+                  <a:srgbClr val="E9D5FF"/>
+                </a:solidFill>
+                <a:latin typeface="Inter" pitchFamily="34" charset="0"/>
+                <a:ea typeface="Inter" pitchFamily="34" charset="-122"/>
+                <a:cs typeface="Inter" pitchFamily="34" charset="-120"/>
+              </a:rPr>
+              <a:t>Westminster House on Monroe</a:t>
+            </a:r>
+            <a:endParaRPr lang="en-US" sz="2300" dirty="0"/>
           </a:p>
         </p:txBody>
       </p:sp>
@@ -8768,12 +10750,12 @@
         </p:nvSpPr>
         <p:spPr>
           <a:xfrm>
-            <a:off x="822960" y="2816352"/>
-            <a:ext cx="5212080" cy="1938528"/>
+            <a:off x="822960" y="3364992"/>
+            <a:ext cx="5230368" cy="1444752"/>
           </a:xfrm>
           <a:prstGeom prst="roundRect">
             <a:avLst>
-              <a:gd name="adj" fmla="val 3774"/>
+              <a:gd name="adj" fmla="val 5063"/>
             </a:avLst>
           </a:prstGeom>
           <a:solidFill>
@@ -8795,30 +10777,26 @@
         </p:nvSpPr>
         <p:spPr>
           <a:xfrm>
-            <a:off x="1133856" y="3127248"/>
-            <a:ext cx="4462272" cy="1170432"/>
-          </a:xfrm>
-          <a:prstGeom prst="rect">
-            <a:avLst/>
-          </a:prstGeom>
-          <a:noFill/>
-          <a:ln/>
-        </p:spPr>
-        <p:txBody>
-          <a:bodyPr wrap="square" lIns="0" tIns="0" rIns="0" bIns="0" rtlCol="0" anchor="t">
+            <a:off x="1115568" y="3675888"/>
+            <a:ext cx="4617720" cy="566928"/>
+          </a:xfrm>
+          <a:prstGeom prst="rect">
+            <a:avLst/>
+          </a:prstGeom>
+          <a:noFill/>
+          <a:ln/>
+        </p:spPr>
+        <p:txBody>
+          <a:bodyPr wrap="square" lIns="0" tIns="0" rIns="0" bIns="0" rtlCol="0" anchor="ctr">
             <a:normAutofit/>
           </a:bodyPr>
           <a:lstStyle/>
           <a:p>
-            <a:pPr marL="190500" indent="-190500">
-              <a:spcAft>
-                <a:spcPts val="200"/>
-              </a:spcAft>
-              <a:buSzPct val="100000"/>
-              <a:buChar char="•"/>
-            </a:pPr>
-            <a:r>
-              <a:rPr lang="en-US" sz="1820" dirty="0">
+            <a:pPr indent="0" marL="0">
+              <a:buNone/>
+            </a:pPr>
+            <a:r>
+              <a:rPr lang="en-US" sz="1800" b="1" dirty="0">
                 <a:solidFill>
                   <a:srgbClr val="1F2937"/>
                 </a:solidFill>
@@ -8826,136 +10804,22 @@
                 <a:ea typeface="Inter" pitchFamily="34" charset="-122"/>
                 <a:cs typeface="Inter" pitchFamily="34" charset="-120"/>
               </a:rPr>
-              <a:t>Sign up now</a:t>
-            </a:r>
-            <a:endParaRPr lang="en-US" sz="1820" dirty="0"/>
-          </a:p>
-          <a:p>
-            <a:pPr marL="190500" indent="-190500">
-              <a:spcAft>
-                <a:spcPts val="200"/>
-              </a:spcAft>
-              <a:buSzPct val="100000"/>
-              <a:buChar char="•"/>
-            </a:pPr>
-            <a:r>
-              <a:rPr lang="en-US" sz="1820" dirty="0">
-                <a:solidFill>
-                  <a:srgbClr val="1F2937"/>
-                </a:solidFill>
-                <a:latin typeface="Inter" pitchFamily="34" charset="0"/>
-                <a:ea typeface="Inter" pitchFamily="34" charset="-122"/>
-                <a:cs typeface="Inter" pitchFamily="34" charset="-120"/>
-              </a:rPr>
-              <a:t>Wear purple</a:t>
-            </a:r>
-            <a:endParaRPr lang="en-US" sz="1820" dirty="0"/>
-          </a:p>
-          <a:p>
-            <a:pPr marL="190500" indent="-190500">
-              <a:spcAft>
-                <a:spcPts val="200"/>
-              </a:spcAft>
-              <a:buSzPct val="100000"/>
-              <a:buChar char="•"/>
-            </a:pPr>
-            <a:r>
-              <a:rPr lang="en-US" sz="1820" dirty="0">
-                <a:solidFill>
-                  <a:srgbClr val="1F2937"/>
-                </a:solidFill>
-                <a:latin typeface="Inter" pitchFamily="34" charset="0"/>
-                <a:ea typeface="Inter" pitchFamily="34" charset="-122"/>
-                <a:cs typeface="Inter" pitchFamily="34" charset="-120"/>
-              </a:rPr>
-              <a:t>Bring one coworker</a:t>
-            </a:r>
-            <a:endParaRPr lang="en-US" sz="1820" dirty="0"/>
-          </a:p>
-          <a:p>
-            <a:pPr marL="190500" indent="-190500">
-              <a:spcAft>
-                <a:spcPts val="200"/>
-              </a:spcAft>
-              <a:buSzPct val="100000"/>
-              <a:buChar char="•"/>
-            </a:pPr>
-            <a:r>
-              <a:rPr lang="en-US" sz="1820" dirty="0">
-                <a:solidFill>
-                  <a:srgbClr val="1F2937"/>
-                </a:solidFill>
-                <a:latin typeface="Inter" pitchFamily="34" charset="0"/>
-                <a:ea typeface="Inter" pitchFamily="34" charset="-122"/>
-                <a:cs typeface="Inter" pitchFamily="34" charset="-120"/>
-              </a:rPr>
-              <a:t>Help turn out your work area</a:t>
-            </a:r>
-            <a:endParaRPr lang="en-US" sz="1820" dirty="0"/>
-          </a:p>
-        </p:txBody>
-      </p:sp>
-      <p:sp>
-        <p:nvSpPr>
-          <p:cNvPr id="8" name="Shape 5"/>
-          <p:cNvSpPr/>
-          <p:nvPr/>
-        </p:nvSpPr>
-        <p:spPr>
-          <a:xfrm>
-            <a:off x="7388352" y="2450592"/>
-            <a:ext cx="3310128" cy="3429000"/>
-          </a:xfrm>
-          <a:prstGeom prst="roundRect">
-            <a:avLst>
-              <a:gd name="adj" fmla="val 2210"/>
-            </a:avLst>
-          </a:prstGeom>
-          <a:solidFill>
-            <a:srgbClr val="FFFFFF"/>
-          </a:solidFill>
-          <a:ln w="12700">
-            <a:solidFill>
-              <a:srgbClr val="FFFFFF"/>
-            </a:solidFill>
-            <a:prstDash val="solid"/>
-          </a:ln>
-        </p:spPr>
-      </p:sp>
-      <p:pic>
-        <p:nvPicPr>
-          <p:cNvPr id="9" name="Image 1" descr="/Users/jaxsnjohnson/github/seiu-website/images/rally-signup-qr.png">    </p:cNvPr>
-          <p:cNvPicPr>
-            <a:picLocks noChangeAspect="1"/>
-          </p:cNvPicPr>
-          <p:nvPr/>
-        </p:nvPicPr>
-        <p:blipFill>
-          <a:blip r:embed="rId2"/>
-          <a:stretch>
-            <a:fillRect/>
-          </a:stretch>
-        </p:blipFill>
-        <p:spPr>
-          <a:xfrm>
-            <a:off x="7790688" y="2743200"/>
-            <a:ext cx="2514600" cy="2514600"/>
-          </a:xfrm>
-          <a:prstGeom prst="rect">
-            <a:avLst/>
-          </a:prstGeom>
-        </p:spPr>
-      </p:pic>
-      <p:sp>
-        <p:nvSpPr>
-          <p:cNvPr id="10" name="Text 6"/>
-          <p:cNvSpPr/>
-          <p:nvPr/>
-        </p:nvSpPr>
-        <p:spPr>
-          <a:xfrm>
-            <a:off x="7662672" y="5376672"/>
-            <a:ext cx="2816352" cy="219456"/>
+              <a:t>Come make signs, bring a coworker, and help us get ready to show OSU that classified staff are organized for a fair contract.</a:t>
+            </a:r>
+            <a:endParaRPr lang="en-US" sz="1800" dirty="0"/>
+          </a:p>
+        </p:txBody>
+      </p:sp>
+      <p:sp>
+        <p:nvSpPr>
+          <p:cNvPr id="8" name="Text 5"/>
+          <p:cNvSpPr/>
+          <p:nvPr/>
+        </p:nvSpPr>
+        <p:spPr>
+          <a:xfrm>
+            <a:off x="841248" y="5486400"/>
+            <a:ext cx="5486400" cy="237744"/>
           </a:xfrm>
           <a:prstGeom prst="rect">
             <a:avLst/>
@@ -8967,21 +10831,21 @@
           <a:bodyPr wrap="square" lIns="0" tIns="0" rIns="0" bIns="0" rtlCol="0" anchor="ctr"/>
           <a:lstStyle/>
           <a:p>
-            <a:pPr algn="ctr" indent="0" marL="0">
-              <a:buNone/>
-            </a:pPr>
-            <a:r>
-              <a:rPr lang="en-US" sz="1900" b="1" dirty="0">
-                <a:solidFill>
-                  <a:srgbClr val="4C1D95"/>
-                </a:solidFill>
-                <a:latin typeface="Inter" pitchFamily="34" charset="0"/>
-                <a:ea typeface="Inter" pitchFamily="34" charset="-122"/>
-                <a:cs typeface="Inter" pitchFamily="34" charset="-120"/>
-              </a:rPr>
-              <a:t>local083.org/rally</a:t>
-            </a:r>
-            <a:endParaRPr lang="en-US" sz="1900" dirty="0"/>
+            <a:pPr indent="0" marL="0">
+              <a:buNone/>
+            </a:pPr>
+            <a:r>
+              <a:rPr lang="en-US" sz="2300" b="1" dirty="0">
+                <a:solidFill>
+                  <a:srgbClr val="FFFFFF"/>
+                </a:solidFill>
+                <a:latin typeface="Lora" pitchFamily="34" charset="0"/>
+                <a:ea typeface="Lora" pitchFamily="34" charset="-122"/>
+                <a:cs typeface="Lora" pitchFamily="34" charset="-120"/>
+              </a:rPr>
+              <a:t>The night before is part of the turnout plan.</a:t>
+            </a:r>
+            <a:endParaRPr lang="en-US" sz="2300" dirty="0"/>
           </a:p>
         </p:txBody>
       </p:sp>
